--- a/submission/puzzledata_repair_report.pptx
+++ b/submission/puzzledata_repair_report.pptx
@@ -1,32 +1,49 @@
 
 <file path=ppt/presentation.xml><?xml version="1.0" encoding="utf-8"?>
-<p:presentation xmlns:a="http://schemas.openxmlformats.org/drawingml/2006/main" xmlns:r="http://schemas.openxmlformats.org/officeDocument/2006/relationships" xmlns:p="http://schemas.openxmlformats.org/presentationml/2006/main" saveSubsetFonts="1" autoCompressPictures="0">
+<p:presentation xmlns:a="http://schemas.openxmlformats.org/drawingml/2006/main" xmlns:r="http://schemas.openxmlformats.org/officeDocument/2006/relationships" xmlns:p="http://schemas.openxmlformats.org/presentationml/2006/main" embedTrueTypeFonts="1" saveSubsetFonts="1" autoCompressPictures="0">
   <p:sldMasterIdLst>
     <p:sldMasterId id="2147483648" r:id="rId1"/>
   </p:sldMasterIdLst>
+  <p:notesMasterIdLst>
+    <p:notesMasterId r:id="rId21"/>
+  </p:notesMasterIdLst>
   <p:sldIdLst>
-    <p:sldId id="256" r:id="rId7"/>
-    <p:sldId id="257" r:id="rId9"/>
-    <p:sldId id="258" r:id="rId10"/>
-    <p:sldId id="259" r:id="rId11"/>
-    <p:sldId id="260" r:id="rId12"/>
-    <p:sldId id="261" r:id="rId13"/>
-    <p:sldId id="262" r:id="rId14"/>
-    <p:sldId id="263" r:id="rId15"/>
-    <p:sldId id="264" r:id="rId16"/>
-    <p:sldId id="265" r:id="rId17"/>
-    <p:sldId id="266" r:id="rId18"/>
-    <p:sldId id="267" r:id="rId19"/>
-    <p:sldId id="268" r:id="rId20"/>
-    <p:sldId id="269" r:id="rId21"/>
-    <p:sldId id="270" r:id="rId22"/>
-    <p:sldId id="271" r:id="rId23"/>
-    <p:sldId id="272" r:id="rId24"/>
-    <p:sldId id="273" r:id="rId25"/>
-    <p:sldId id="274" r:id="rId26"/>
+    <p:sldId id="256" r:id="rId2"/>
+    <p:sldId id="257" r:id="rId3"/>
+    <p:sldId id="258" r:id="rId4"/>
+    <p:sldId id="259" r:id="rId5"/>
+    <p:sldId id="260" r:id="rId6"/>
+    <p:sldId id="261" r:id="rId7"/>
+    <p:sldId id="262" r:id="rId8"/>
+    <p:sldId id="263" r:id="rId9"/>
+    <p:sldId id="264" r:id="rId10"/>
+    <p:sldId id="265" r:id="rId11"/>
+    <p:sldId id="266" r:id="rId12"/>
+    <p:sldId id="267" r:id="rId13"/>
+    <p:sldId id="268" r:id="rId14"/>
+    <p:sldId id="269" r:id="rId15"/>
+    <p:sldId id="270" r:id="rId16"/>
+    <p:sldId id="271" r:id="rId17"/>
+    <p:sldId id="272" r:id="rId18"/>
+    <p:sldId id="273" r:id="rId19"/>
+    <p:sldId id="274" r:id="rId20"/>
   </p:sldIdLst>
-  <p:sldSz cx="12191695" cy="6858000" type="screen4x3"/>
+  <p:sldSz cx="12192000" cy="6858000"/>
   <p:notesSz cx="6858000" cy="9144000"/>
+  <p:embeddedFontLst>
+    <p:embeddedFont>
+      <p:font typeface="맑은 고딕" panose="020B0503020000020004" pitchFamily="50" charset="-127"/>
+      <p:regular r:id="rId22"/>
+      <p:bold r:id="rId23"/>
+    </p:embeddedFont>
+    <p:embeddedFont>
+      <p:font typeface="Consolas" panose="020B0609020204030204" pitchFamily="49" charset="0"/>
+      <p:regular r:id="rId24"/>
+      <p:bold r:id="rId25"/>
+      <p:italic r:id="rId26"/>
+      <p:boldItalic r:id="rId27"/>
+    </p:embeddedFont>
+  </p:embeddedFontLst>
   <p:defaultTextStyle>
     <a:defPPr>
       <a:defRPr lang="en-US"/>
@@ -125,21 +142,21 @@
   <p:extLst>
     <p:ext uri="{521415D9-36F7-43E2-AB2F-B90AF26B5E84}">
       <p14:sectionLst xmlns:p14="http://schemas.microsoft.com/office/powerpoint/2010/main">
-        <p14:section name="Part 00 · 인트로" id="{B2148ABA-FA65-45A9-A9FC-3EBDB18698A2}">
+        <p14:section name="Part 00 · 인트로" id="{A61B80BD-90E6-433F-9D43-43FE56B17982}">
           <p14:sldIdLst>
             <p14:sldId id="256"/>
             <p14:sldId id="257"/>
             <p14:sldId id="258"/>
           </p14:sldIdLst>
         </p14:section>
-        <p14:section name="Part 01 · 데이터 진단" id="{AEED452C-01D3-4AAC-8D5C-484F7439B8FA}">
+        <p14:section name="Part 01 · 데이터 진단" id="{8230E63B-9ED8-4FE4-B64D-B4903261E8A6}">
           <p14:sldIdLst>
             <p14:sldId id="259"/>
             <p14:sldId id="260"/>
             <p14:sldId id="261"/>
           </p14:sldIdLst>
         </p14:section>
-        <p14:section name="Part 02 · 병목 규명" id="{07CDFE53-82B9-49A6-8BFC-1A2E20EBEAFE}">
+        <p14:section name="Part 02 · 병목 규명" id="{823FB230-6B2F-4492-9723-EB4EEDCF6F5E}">
           <p14:sldIdLst>
             <p14:sldId id="262"/>
             <p14:sldId id="263"/>
@@ -152,26 +169,40 @@
             <p14:sldId id="270"/>
           </p14:sldIdLst>
         </p14:section>
-        <p14:section name="Part 03 · 개선 전략" id="{7B4C3E46-0715-4B73-A18F-BFB26E925BA1}">
+        <p14:section name="Part 03 · 개선 전략" id="{C069E015-9E27-493C-859A-F678255D398C}">
           <p14:sldIdLst>
             <p14:sldId id="271"/>
             <p14:sldId id="272"/>
             <p14:sldId id="273"/>
           </p14:sldIdLst>
         </p14:section>
-        <p14:section name="Part 04 · Q&amp;A" id="{EB7D1B14-EAF6-4B9B-8B47-CCB54D949519}">
+        <p14:section name="Part 04 · Q&amp;A" id="{7C197D7F-E718-4B45-B07A-9830F6ED98E6}">
           <p14:sldIdLst>
             <p14:sldId id="274"/>
           </p14:sldIdLst>
         </p14:section>
       </p14:sectionLst>
     </p:ext>
+    <p:ext uri="{EFAFB233-063F-42B5-8137-9DF3F51BA10A}">
+      <p15:sldGuideLst xmlns:p15="http://schemas.microsoft.com/office/powerpoint/2012/main">
+        <p15:guide id="1" orient="horz" pos="2160">
+          <p15:clr>
+            <a:srgbClr val="A4A3A4"/>
+          </p15:clr>
+        </p15:guide>
+        <p15:guide id="2" pos="2880">
+          <p15:clr>
+            <a:srgbClr val="A4A3A4"/>
+          </p15:clr>
+        </p15:guide>
+      </p15:sldGuideLst>
+    </p:ext>
   </p:extLst>
 </p:presentation>
 </file>
 
 <file path=ppt/notesMasters/notesMaster1.xml><?xml version="1.0" encoding="utf-8"?>
-<p:notesMaster xmlns:a="http://schemas.openxmlformats.org/drawingml/2006/main" xmlns:p="http://schemas.openxmlformats.org/presentationml/2006/main" xmlns:r="http://schemas.openxmlformats.org/officeDocument/2006/relationships">
+<p:notesMaster xmlns:a="http://schemas.openxmlformats.org/drawingml/2006/main" xmlns:r="http://schemas.openxmlformats.org/officeDocument/2006/relationships" xmlns:p="http://schemas.openxmlformats.org/presentationml/2006/main">
   <p:cSld>
     <p:bg>
       <p:bgRef idx="1001">
@@ -192,241 +223,16 @@
           <a:chExt cx="0" cy="0"/>
         </a:xfrm>
       </p:grpSpPr>
-      <p:sp>
-        <p:nvSpPr>
-          <p:cNvPr id="2" name="Header Placeholder 1"/>
-          <p:cNvSpPr>
-            <a:spLocks noGrp="1"/>
-          </p:cNvSpPr>
-          <p:nvPr>
-            <p:ph type="hdr" sz="quarter"/>
-          </p:nvPr>
-        </p:nvSpPr>
-        <p:spPr>
-          <a:xfrm>
-            <a:off x="0" y="0"/>
-            <a:ext cx="2971800" cy="457200"/>
-          </a:xfrm>
-          <a:prstGeom prst="rect">
-            <a:avLst/>
-          </a:prstGeom>
-        </p:spPr>
-        <p:txBody>
-          <a:bodyPr vert="horz" lIns="91440" tIns="45720" rIns="91440" bIns="45720" rtlCol="0"/>
-          <a:lstStyle>
-            <a:lvl1pPr algn="l">
-              <a:defRPr sz="1200"/>
-            </a:lvl1pPr>
-          </a:lstStyle>
-          <a:p>
-            <a:endParaRPr lang="en-US"/>
-          </a:p>
-        </p:txBody>
-      </p:sp>
-      <p:sp>
-        <p:nvSpPr>
-          <p:cNvPr id="3" name="Date Placeholder 2"/>
-          <p:cNvSpPr>
-            <a:spLocks noGrp="1"/>
-          </p:cNvSpPr>
-          <p:nvPr>
-            <p:ph type="dt" idx="1"/>
-          </p:nvPr>
-        </p:nvSpPr>
-        <p:spPr>
-          <a:xfrm>
-            <a:off x="3884613" y="0"/>
-            <a:ext cx="2971800" cy="457200"/>
-          </a:xfrm>
-          <a:prstGeom prst="rect">
-            <a:avLst/>
-          </a:prstGeom>
-        </p:spPr>
-        <p:txBody>
-          <a:bodyPr vert="horz" lIns="91440" tIns="45720" rIns="91440" bIns="45720" rtlCol="0"/>
-          <a:lstStyle>
-            <a:lvl1pPr algn="r">
-              <a:defRPr sz="1200"/>
-            </a:lvl1pPr>
-          </a:lstStyle>
-          <a:p>
-            <a:fld id="{0F89C1C7-3DCD-1040-A9CF-14679D8B5DDD}" type="datetimeFigureOut">
-              <a:rPr lang="en-US" smtClean="0"/>
-              <a:t>10/17/16</a:t>
-            </a:fld>
-            <a:endParaRPr lang="en-US"/>
-          </a:p>
-        </p:txBody>
-      </p:sp>
-      <p:sp>
-        <p:nvSpPr>
-          <p:cNvPr id="4" name="Slide Image Placeholder 3"/>
-          <p:cNvSpPr>
-            <a:spLocks noGrp="1" noRot="1" noChangeAspect="1"/>
-          </p:cNvSpPr>
-          <p:nvPr>
-            <p:ph type="sldImg" idx="2"/>
-          </p:nvPr>
-        </p:nvSpPr>
-        <p:spPr>
-          <a:xfrm>
-            <a:off x="1143000" y="685800"/>
-            <a:ext cx="4572000" cy="3429000"/>
-          </a:xfrm>
-          <a:prstGeom prst="rect">
-            <a:avLst/>
-          </a:prstGeom>
-          <a:noFill/>
-          <a:ln w="12700">
-            <a:solidFill>
-              <a:prstClr val="black"/>
-            </a:solidFill>
-          </a:ln>
-        </p:spPr>
-        <p:txBody>
-          <a:bodyPr vert="horz" lIns="91440" tIns="45720" rIns="91440" bIns="45720" rtlCol="0" anchor="ctr"/>
-          <a:lstStyle/>
-          <a:p>
-            <a:endParaRPr lang="en-US"/>
-          </a:p>
-        </p:txBody>
-      </p:sp>
-      <p:sp>
-        <p:nvSpPr>
-          <p:cNvPr id="5" name="Notes Placeholder 4"/>
-          <p:cNvSpPr>
-            <a:spLocks noGrp="1"/>
-          </p:cNvSpPr>
-          <p:nvPr>
-            <p:ph type="body" sz="quarter" idx="3"/>
-          </p:nvPr>
-        </p:nvSpPr>
-        <p:spPr>
-          <a:xfrm>
-            <a:off x="685800" y="4343400"/>
-            <a:ext cx="5486400" cy="4114800"/>
-          </a:xfrm>
-          <a:prstGeom prst="rect">
-            <a:avLst/>
-          </a:prstGeom>
-        </p:spPr>
-        <p:txBody>
-          <a:bodyPr vert="horz" lIns="91440" tIns="45720" rIns="91440" bIns="45720" rtlCol="0"/>
-          <a:lstStyle/>
-          <a:p>
-            <a:pPr lvl="0"/>
-            <a:r>
-              <a:rPr lang="en-US" smtClean="0"/>
-              <a:t>Click to edit Master text styles</a:t>
-            </a:r>
-          </a:p>
-          <a:p>
-            <a:pPr lvl="1"/>
-            <a:r>
-              <a:rPr lang="en-US" smtClean="0"/>
-              <a:t>Second level</a:t>
-            </a:r>
-          </a:p>
-          <a:p>
-            <a:pPr lvl="2"/>
-            <a:r>
-              <a:rPr lang="en-US" smtClean="0"/>
-              <a:t>Third level</a:t>
-            </a:r>
-          </a:p>
-          <a:p>
-            <a:pPr lvl="3"/>
-            <a:r>
-              <a:rPr lang="en-US" smtClean="0"/>
-              <a:t>Fourth level</a:t>
-            </a:r>
-          </a:p>
-          <a:p>
-            <a:pPr lvl="4"/>
-            <a:r>
-              <a:rPr lang="en-US" smtClean="0"/>
-              <a:t>Fifth level</a:t>
-            </a:r>
-            <a:endParaRPr lang="en-US"/>
-          </a:p>
-        </p:txBody>
-      </p:sp>
-      <p:sp>
-        <p:nvSpPr>
-          <p:cNvPr id="6" name="Footer Placeholder 5"/>
-          <p:cNvSpPr>
-            <a:spLocks noGrp="1"/>
-          </p:cNvSpPr>
-          <p:nvPr>
-            <p:ph type="ftr" sz="quarter" idx="4"/>
-          </p:nvPr>
-        </p:nvSpPr>
-        <p:spPr>
-          <a:xfrm>
-            <a:off x="0" y="8685213"/>
-            <a:ext cx="2971800" cy="457200"/>
-          </a:xfrm>
-          <a:prstGeom prst="rect">
-            <a:avLst/>
-          </a:prstGeom>
-        </p:spPr>
-        <p:txBody>
-          <a:bodyPr vert="horz" lIns="91440" tIns="45720" rIns="91440" bIns="45720" rtlCol="0" anchor="b"/>
-          <a:lstStyle>
-            <a:lvl1pPr algn="l">
-              <a:defRPr sz="1200"/>
-            </a:lvl1pPr>
-          </a:lstStyle>
-          <a:p>
-            <a:endParaRPr lang="en-US"/>
-          </a:p>
-        </p:txBody>
-      </p:sp>
-      <p:sp>
-        <p:nvSpPr>
-          <p:cNvPr id="7" name="Slide Number Placeholder 6"/>
-          <p:cNvSpPr>
-            <a:spLocks noGrp="1"/>
-          </p:cNvSpPr>
-          <p:nvPr>
-            <p:ph type="sldNum" sz="quarter" idx="5"/>
-          </p:nvPr>
-        </p:nvSpPr>
-        <p:spPr>
-          <a:xfrm>
-            <a:off x="3884613" y="8685213"/>
-            <a:ext cx="2971800" cy="457200"/>
-          </a:xfrm>
-          <a:prstGeom prst="rect">
-            <a:avLst/>
-          </a:prstGeom>
-        </p:spPr>
-        <p:txBody>
-          <a:bodyPr vert="horz" lIns="91440" tIns="45720" rIns="91440" bIns="45720" rtlCol="0" anchor="b"/>
-          <a:lstStyle>
-            <a:lvl1pPr algn="r">
-              <a:defRPr sz="1200"/>
-            </a:lvl1pPr>
-          </a:lstStyle>
-          <a:p>
-            <a:fld id="{BB5E49A5-4136-284D-997B-48E1D791AD67}" type="slidenum">
-              <a:rPr lang="en-US" smtClean="0"/>
-              <a:t>‹#›</a:t>
-            </a:fld>
-            <a:endParaRPr lang="en-US"/>
-          </a:p>
-        </p:txBody>
-      </p:sp>
     </p:spTree>
     <p:extLst>
       <p:ext uri="{BB962C8B-B14F-4D97-AF65-F5344CB8AC3E}">
-        <p14:creationId xmlns:p14="http://schemas.microsoft.com/office/powerpoint/2010/main" val="2623252185"/>
+        <p14:creationId xmlns:p14="http://schemas.microsoft.com/office/powerpoint/2010/main" val="2181044953"/>
       </p:ext>
     </p:extLst>
   </p:cSld>
   <p:clrMap bg1="lt1" tx1="dk1" bg2="lt2" tx2="dk2" accent1="accent1" accent2="accent2" accent3="accent3" accent4="accent4" accent5="accent5" accent6="accent6" hlink="hlink" folHlink="folHlink"/>
   <p:notesStyle>
-    <a:lvl1pPr marL="0" algn="l" defTabSz="457200" rtl="0" eaLnBrk="1" latinLnBrk="0" hangingPunct="1">
+    <a:lvl1pPr marL="0" algn="l" defTabSz="914400" rtl="0" eaLnBrk="1" latinLnBrk="1" hangingPunct="1">
       <a:defRPr sz="1200" kern="1200">
         <a:solidFill>
           <a:schemeClr val="tx1"/>
@@ -436,7 +242,7 @@
         <a:cs typeface="+mn-cs"/>
       </a:defRPr>
     </a:lvl1pPr>
-    <a:lvl2pPr marL="457200" algn="l" defTabSz="457200" rtl="0" eaLnBrk="1" latinLnBrk="0" hangingPunct="1">
+    <a:lvl2pPr marL="457200" algn="l" defTabSz="914400" rtl="0" eaLnBrk="1" latinLnBrk="1" hangingPunct="1">
       <a:defRPr sz="1200" kern="1200">
         <a:solidFill>
           <a:schemeClr val="tx1"/>
@@ -446,7 +252,7 @@
         <a:cs typeface="+mn-cs"/>
       </a:defRPr>
     </a:lvl2pPr>
-    <a:lvl3pPr marL="914400" algn="l" defTabSz="457200" rtl="0" eaLnBrk="1" latinLnBrk="0" hangingPunct="1">
+    <a:lvl3pPr marL="914400" algn="l" defTabSz="914400" rtl="0" eaLnBrk="1" latinLnBrk="1" hangingPunct="1">
       <a:defRPr sz="1200" kern="1200">
         <a:solidFill>
           <a:schemeClr val="tx1"/>
@@ -456,7 +262,7 @@
         <a:cs typeface="+mn-cs"/>
       </a:defRPr>
     </a:lvl3pPr>
-    <a:lvl4pPr marL="1371600" algn="l" defTabSz="457200" rtl="0" eaLnBrk="1" latinLnBrk="0" hangingPunct="1">
+    <a:lvl4pPr marL="1371600" algn="l" defTabSz="914400" rtl="0" eaLnBrk="1" latinLnBrk="1" hangingPunct="1">
       <a:defRPr sz="1200" kern="1200">
         <a:solidFill>
           <a:schemeClr val="tx1"/>
@@ -466,7 +272,7 @@
         <a:cs typeface="+mn-cs"/>
       </a:defRPr>
     </a:lvl4pPr>
-    <a:lvl5pPr marL="1828800" algn="l" defTabSz="457200" rtl="0" eaLnBrk="1" latinLnBrk="0" hangingPunct="1">
+    <a:lvl5pPr marL="1828800" algn="l" defTabSz="914400" rtl="0" eaLnBrk="1" latinLnBrk="1" hangingPunct="1">
       <a:defRPr sz="1200" kern="1200">
         <a:solidFill>
           <a:schemeClr val="tx1"/>
@@ -476,7 +282,7 @@
         <a:cs typeface="+mn-cs"/>
       </a:defRPr>
     </a:lvl5pPr>
-    <a:lvl6pPr marL="2286000" algn="l" defTabSz="457200" rtl="0" eaLnBrk="1" latinLnBrk="0" hangingPunct="1">
+    <a:lvl6pPr marL="2286000" algn="l" defTabSz="914400" rtl="0" eaLnBrk="1" latinLnBrk="1" hangingPunct="1">
       <a:defRPr sz="1200" kern="1200">
         <a:solidFill>
           <a:schemeClr val="tx1"/>
@@ -486,7 +292,7 @@
         <a:cs typeface="+mn-cs"/>
       </a:defRPr>
     </a:lvl6pPr>
-    <a:lvl7pPr marL="2743200" algn="l" defTabSz="457200" rtl="0" eaLnBrk="1" latinLnBrk="0" hangingPunct="1">
+    <a:lvl7pPr marL="2743200" algn="l" defTabSz="914400" rtl="0" eaLnBrk="1" latinLnBrk="1" hangingPunct="1">
       <a:defRPr sz="1200" kern="1200">
         <a:solidFill>
           <a:schemeClr val="tx1"/>
@@ -496,7 +302,7 @@
         <a:cs typeface="+mn-cs"/>
       </a:defRPr>
     </a:lvl7pPr>
-    <a:lvl8pPr marL="3200400" algn="l" defTabSz="457200" rtl="0" eaLnBrk="1" latinLnBrk="0" hangingPunct="1">
+    <a:lvl8pPr marL="3200400" algn="l" defTabSz="914400" rtl="0" eaLnBrk="1" latinLnBrk="1" hangingPunct="1">
       <a:defRPr sz="1200" kern="1200">
         <a:solidFill>
           <a:schemeClr val="tx1"/>
@@ -506,7 +312,7 @@
         <a:cs typeface="+mn-cs"/>
       </a:defRPr>
     </a:lvl8pPr>
-    <a:lvl9pPr marL="3657600" algn="l" defTabSz="457200" rtl="0" eaLnBrk="1" latinLnBrk="0" hangingPunct="1">
+    <a:lvl9pPr marL="3657600" algn="l" defTabSz="914400" rtl="0" eaLnBrk="1" latinLnBrk="1" hangingPunct="1">
       <a:defRPr sz="1200" kern="1200">
         <a:solidFill>
           <a:schemeClr val="tx1"/>
@@ -521,7 +327,7 @@
 </file>
 
 <file path=ppt/notesSlides/notesSlide1.xml><?xml version="1.0" encoding="utf-8"?>
-<p:notes xmlns:a="http://schemas.openxmlformats.org/drawingml/2006/main" xmlns:p="http://schemas.openxmlformats.org/presentationml/2006/main" xmlns:r="http://schemas.openxmlformats.org/officeDocument/2006/relationships">
+<p:notes xmlns:a="http://schemas.openxmlformats.org/drawingml/2006/main" xmlns:r="http://schemas.openxmlformats.org/officeDocument/2006/relationships" xmlns:p="http://schemas.openxmlformats.org/presentationml/2006/main">
   <p:cSld>
     <p:spTree>
       <p:nvGrpSpPr>
@@ -541,7 +347,7 @@
         <p:nvSpPr>
           <p:cNvPr id="2" name="Slide Image Placeholder 1"/>
           <p:cNvSpPr>
-            <a:spLocks noGrp="1"/>
+            <a:spLocks noGrp="1" noRot="1" noChangeAspect="1"/>
           </p:cNvSpPr>
           <p:nvPr>
             <p:ph type="sldImg" idx="2"/>
@@ -556,7 +362,7 @@
             <a:spLocks noGrp="1"/>
           </p:cNvSpPr>
           <p:nvPr>
-            <p:ph type="body" idx="3" sz="quarter"/>
+            <p:ph type="body" sz="quarter" idx="3"/>
           </p:nvPr>
         </p:nvSpPr>
         <p:spPr/>
@@ -577,7 +383,7 @@
             <a:spLocks noGrp="1"/>
           </p:cNvSpPr>
           <p:nvPr>
-            <p:ph type="sldNum" idx="5" sz="quarter"/>
+            <p:ph type="sldNum" sz="quarter" idx="5"/>
           </p:nvPr>
         </p:nvSpPr>
         <p:spPr/>
@@ -591,7 +397,7 @@
 </file>
 
 <file path=ppt/notesSlides/notesSlide10.xml><?xml version="1.0" encoding="utf-8"?>
-<p:notes xmlns:a="http://schemas.openxmlformats.org/drawingml/2006/main" xmlns:p="http://schemas.openxmlformats.org/presentationml/2006/main" xmlns:r="http://schemas.openxmlformats.org/officeDocument/2006/relationships">
+<p:notes xmlns:a="http://schemas.openxmlformats.org/drawingml/2006/main" xmlns:r="http://schemas.openxmlformats.org/officeDocument/2006/relationships" xmlns:p="http://schemas.openxmlformats.org/presentationml/2006/main">
   <p:cSld>
     <p:spTree>
       <p:nvGrpSpPr>
@@ -611,7 +417,7 @@
         <p:nvSpPr>
           <p:cNvPr id="2" name="Slide Image Placeholder 1"/>
           <p:cNvSpPr>
-            <a:spLocks noGrp="1"/>
+            <a:spLocks noGrp="1" noRot="1" noChangeAspect="1"/>
           </p:cNvSpPr>
           <p:nvPr>
             <p:ph type="sldImg" idx="2"/>
@@ -626,7 +432,7 @@
             <a:spLocks noGrp="1"/>
           </p:cNvSpPr>
           <p:nvPr>
-            <p:ph type="body" idx="3" sz="quarter"/>
+            <p:ph type="body" sz="quarter" idx="3"/>
           </p:nvPr>
         </p:nvSpPr>
         <p:spPr/>
@@ -647,7 +453,7 @@
             <a:spLocks noGrp="1"/>
           </p:cNvSpPr>
           <p:nvPr>
-            <p:ph type="sldNum" idx="5" sz="quarter"/>
+            <p:ph type="sldNum" sz="quarter" idx="5"/>
           </p:nvPr>
         </p:nvSpPr>
         <p:spPr/>
@@ -661,7 +467,7 @@
 </file>
 
 <file path=ppt/notesSlides/notesSlide11.xml><?xml version="1.0" encoding="utf-8"?>
-<p:notes xmlns:a="http://schemas.openxmlformats.org/drawingml/2006/main" xmlns:p="http://schemas.openxmlformats.org/presentationml/2006/main" xmlns:r="http://schemas.openxmlformats.org/officeDocument/2006/relationships">
+<p:notes xmlns:a="http://schemas.openxmlformats.org/drawingml/2006/main" xmlns:r="http://schemas.openxmlformats.org/officeDocument/2006/relationships" xmlns:p="http://schemas.openxmlformats.org/presentationml/2006/main">
   <p:cSld>
     <p:spTree>
       <p:nvGrpSpPr>
@@ -681,7 +487,7 @@
         <p:nvSpPr>
           <p:cNvPr id="2" name="Slide Image Placeholder 1"/>
           <p:cNvSpPr>
-            <a:spLocks noGrp="1"/>
+            <a:spLocks noGrp="1" noRot="1" noChangeAspect="1"/>
           </p:cNvSpPr>
           <p:nvPr>
             <p:ph type="sldImg" idx="2"/>
@@ -696,7 +502,7 @@
             <a:spLocks noGrp="1"/>
           </p:cNvSpPr>
           <p:nvPr>
-            <p:ph type="body" idx="3" sz="quarter"/>
+            <p:ph type="body" sz="quarter" idx="3"/>
           </p:nvPr>
         </p:nvSpPr>
         <p:spPr/>
@@ -717,7 +523,7 @@
             <a:spLocks noGrp="1"/>
           </p:cNvSpPr>
           <p:nvPr>
-            <p:ph type="sldNum" idx="5" sz="quarter"/>
+            <p:ph type="sldNum" sz="quarter" idx="5"/>
           </p:nvPr>
         </p:nvSpPr>
         <p:spPr/>
@@ -731,7 +537,7 @@
 </file>
 
 <file path=ppt/notesSlides/notesSlide12.xml><?xml version="1.0" encoding="utf-8"?>
-<p:notes xmlns:a="http://schemas.openxmlformats.org/drawingml/2006/main" xmlns:p="http://schemas.openxmlformats.org/presentationml/2006/main" xmlns:r="http://schemas.openxmlformats.org/officeDocument/2006/relationships">
+<p:notes xmlns:a="http://schemas.openxmlformats.org/drawingml/2006/main" xmlns:r="http://schemas.openxmlformats.org/officeDocument/2006/relationships" xmlns:p="http://schemas.openxmlformats.org/presentationml/2006/main">
   <p:cSld>
     <p:spTree>
       <p:nvGrpSpPr>
@@ -751,7 +557,7 @@
         <p:nvSpPr>
           <p:cNvPr id="2" name="Slide Image Placeholder 1"/>
           <p:cNvSpPr>
-            <a:spLocks noGrp="1"/>
+            <a:spLocks noGrp="1" noRot="1" noChangeAspect="1"/>
           </p:cNvSpPr>
           <p:nvPr>
             <p:ph type="sldImg" idx="2"/>
@@ -766,7 +572,7 @@
             <a:spLocks noGrp="1"/>
           </p:cNvSpPr>
           <p:nvPr>
-            <p:ph type="body" idx="3" sz="quarter"/>
+            <p:ph type="body" sz="quarter" idx="3"/>
           </p:nvPr>
         </p:nvSpPr>
         <p:spPr/>
@@ -787,7 +593,7 @@
             <a:spLocks noGrp="1"/>
           </p:cNvSpPr>
           <p:nvPr>
-            <p:ph type="sldNum" idx="5" sz="quarter"/>
+            <p:ph type="sldNum" sz="quarter" idx="5"/>
           </p:nvPr>
         </p:nvSpPr>
         <p:spPr/>
@@ -801,7 +607,7 @@
 </file>
 
 <file path=ppt/notesSlides/notesSlide13.xml><?xml version="1.0" encoding="utf-8"?>
-<p:notes xmlns:a="http://schemas.openxmlformats.org/drawingml/2006/main" xmlns:p="http://schemas.openxmlformats.org/presentationml/2006/main" xmlns:r="http://schemas.openxmlformats.org/officeDocument/2006/relationships">
+<p:notes xmlns:a="http://schemas.openxmlformats.org/drawingml/2006/main" xmlns:r="http://schemas.openxmlformats.org/officeDocument/2006/relationships" xmlns:p="http://schemas.openxmlformats.org/presentationml/2006/main">
   <p:cSld>
     <p:spTree>
       <p:nvGrpSpPr>
@@ -821,7 +627,7 @@
         <p:nvSpPr>
           <p:cNvPr id="2" name="Slide Image Placeholder 1"/>
           <p:cNvSpPr>
-            <a:spLocks noGrp="1"/>
+            <a:spLocks noGrp="1" noRot="1" noChangeAspect="1"/>
           </p:cNvSpPr>
           <p:nvPr>
             <p:ph type="sldImg" idx="2"/>
@@ -836,7 +642,7 @@
             <a:spLocks noGrp="1"/>
           </p:cNvSpPr>
           <p:nvPr>
-            <p:ph type="body" idx="3" sz="quarter"/>
+            <p:ph type="body" sz="quarter" idx="3"/>
           </p:nvPr>
         </p:nvSpPr>
         <p:spPr/>
@@ -857,7 +663,7 @@
             <a:spLocks noGrp="1"/>
           </p:cNvSpPr>
           <p:nvPr>
-            <p:ph type="sldNum" idx="5" sz="quarter"/>
+            <p:ph type="sldNum" sz="quarter" idx="5"/>
           </p:nvPr>
         </p:nvSpPr>
         <p:spPr/>
@@ -871,7 +677,7 @@
 </file>
 
 <file path=ppt/notesSlides/notesSlide14.xml><?xml version="1.0" encoding="utf-8"?>
-<p:notes xmlns:a="http://schemas.openxmlformats.org/drawingml/2006/main" xmlns:p="http://schemas.openxmlformats.org/presentationml/2006/main" xmlns:r="http://schemas.openxmlformats.org/officeDocument/2006/relationships">
+<p:notes xmlns:a="http://schemas.openxmlformats.org/drawingml/2006/main" xmlns:r="http://schemas.openxmlformats.org/officeDocument/2006/relationships" xmlns:p="http://schemas.openxmlformats.org/presentationml/2006/main">
   <p:cSld>
     <p:spTree>
       <p:nvGrpSpPr>
@@ -891,7 +697,7 @@
         <p:nvSpPr>
           <p:cNvPr id="2" name="Slide Image Placeholder 1"/>
           <p:cNvSpPr>
-            <a:spLocks noGrp="1"/>
+            <a:spLocks noGrp="1" noRot="1" noChangeAspect="1"/>
           </p:cNvSpPr>
           <p:nvPr>
             <p:ph type="sldImg" idx="2"/>
@@ -906,7 +712,7 @@
             <a:spLocks noGrp="1"/>
           </p:cNvSpPr>
           <p:nvPr>
-            <p:ph type="body" idx="3" sz="quarter"/>
+            <p:ph type="body" sz="quarter" idx="3"/>
           </p:nvPr>
         </p:nvSpPr>
         <p:spPr/>
@@ -927,7 +733,7 @@
             <a:spLocks noGrp="1"/>
           </p:cNvSpPr>
           <p:nvPr>
-            <p:ph type="sldNum" idx="5" sz="quarter"/>
+            <p:ph type="sldNum" sz="quarter" idx="5"/>
           </p:nvPr>
         </p:nvSpPr>
         <p:spPr/>
@@ -941,7 +747,7 @@
 </file>
 
 <file path=ppt/notesSlides/notesSlide15.xml><?xml version="1.0" encoding="utf-8"?>
-<p:notes xmlns:a="http://schemas.openxmlformats.org/drawingml/2006/main" xmlns:p="http://schemas.openxmlformats.org/presentationml/2006/main" xmlns:r="http://schemas.openxmlformats.org/officeDocument/2006/relationships">
+<p:notes xmlns:a="http://schemas.openxmlformats.org/drawingml/2006/main" xmlns:r="http://schemas.openxmlformats.org/officeDocument/2006/relationships" xmlns:p="http://schemas.openxmlformats.org/presentationml/2006/main">
   <p:cSld>
     <p:spTree>
       <p:nvGrpSpPr>
@@ -961,7 +767,7 @@
         <p:nvSpPr>
           <p:cNvPr id="2" name="Slide Image Placeholder 1"/>
           <p:cNvSpPr>
-            <a:spLocks noGrp="1"/>
+            <a:spLocks noGrp="1" noRot="1" noChangeAspect="1"/>
           </p:cNvSpPr>
           <p:nvPr>
             <p:ph type="sldImg" idx="2"/>
@@ -976,7 +782,7 @@
             <a:spLocks noGrp="1"/>
           </p:cNvSpPr>
           <p:nvPr>
-            <p:ph type="body" idx="3" sz="quarter"/>
+            <p:ph type="body" sz="quarter" idx="3"/>
           </p:nvPr>
         </p:nvSpPr>
         <p:spPr/>
@@ -997,7 +803,7 @@
             <a:spLocks noGrp="1"/>
           </p:cNvSpPr>
           <p:nvPr>
-            <p:ph type="sldNum" idx="5" sz="quarter"/>
+            <p:ph type="sldNum" sz="quarter" idx="5"/>
           </p:nvPr>
         </p:nvSpPr>
         <p:spPr/>
@@ -1011,7 +817,7 @@
 </file>
 
 <file path=ppt/notesSlides/notesSlide16.xml><?xml version="1.0" encoding="utf-8"?>
-<p:notes xmlns:a="http://schemas.openxmlformats.org/drawingml/2006/main" xmlns:p="http://schemas.openxmlformats.org/presentationml/2006/main" xmlns:r="http://schemas.openxmlformats.org/officeDocument/2006/relationships">
+<p:notes xmlns:a="http://schemas.openxmlformats.org/drawingml/2006/main" xmlns:r="http://schemas.openxmlformats.org/officeDocument/2006/relationships" xmlns:p="http://schemas.openxmlformats.org/presentationml/2006/main">
   <p:cSld>
     <p:spTree>
       <p:nvGrpSpPr>
@@ -1031,7 +837,7 @@
         <p:nvSpPr>
           <p:cNvPr id="2" name="Slide Image Placeholder 1"/>
           <p:cNvSpPr>
-            <a:spLocks noGrp="1"/>
+            <a:spLocks noGrp="1" noRot="1" noChangeAspect="1"/>
           </p:cNvSpPr>
           <p:nvPr>
             <p:ph type="sldImg" idx="2"/>
@@ -1046,7 +852,7 @@
             <a:spLocks noGrp="1"/>
           </p:cNvSpPr>
           <p:nvPr>
-            <p:ph type="body" idx="3" sz="quarter"/>
+            <p:ph type="body" sz="quarter" idx="3"/>
           </p:nvPr>
         </p:nvSpPr>
         <p:spPr/>
@@ -1067,7 +873,7 @@
             <a:spLocks noGrp="1"/>
           </p:cNvSpPr>
           <p:nvPr>
-            <p:ph type="sldNum" idx="5" sz="quarter"/>
+            <p:ph type="sldNum" sz="quarter" idx="5"/>
           </p:nvPr>
         </p:nvSpPr>
         <p:spPr/>
@@ -1081,7 +887,7 @@
 </file>
 
 <file path=ppt/notesSlides/notesSlide17.xml><?xml version="1.0" encoding="utf-8"?>
-<p:notes xmlns:a="http://schemas.openxmlformats.org/drawingml/2006/main" xmlns:p="http://schemas.openxmlformats.org/presentationml/2006/main" xmlns:r="http://schemas.openxmlformats.org/officeDocument/2006/relationships">
+<p:notes xmlns:a="http://schemas.openxmlformats.org/drawingml/2006/main" xmlns:r="http://schemas.openxmlformats.org/officeDocument/2006/relationships" xmlns:p="http://schemas.openxmlformats.org/presentationml/2006/main">
   <p:cSld>
     <p:spTree>
       <p:nvGrpSpPr>
@@ -1101,7 +907,7 @@
         <p:nvSpPr>
           <p:cNvPr id="2" name="Slide Image Placeholder 1"/>
           <p:cNvSpPr>
-            <a:spLocks noGrp="1"/>
+            <a:spLocks noGrp="1" noRot="1" noChangeAspect="1"/>
           </p:cNvSpPr>
           <p:nvPr>
             <p:ph type="sldImg" idx="2"/>
@@ -1116,7 +922,7 @@
             <a:spLocks noGrp="1"/>
           </p:cNvSpPr>
           <p:nvPr>
-            <p:ph type="body" idx="3" sz="quarter"/>
+            <p:ph type="body" sz="quarter" idx="3"/>
           </p:nvPr>
         </p:nvSpPr>
         <p:spPr/>
@@ -1137,7 +943,7 @@
             <a:spLocks noGrp="1"/>
           </p:cNvSpPr>
           <p:nvPr>
-            <p:ph type="sldNum" idx="5" sz="quarter"/>
+            <p:ph type="sldNum" sz="quarter" idx="5"/>
           </p:nvPr>
         </p:nvSpPr>
         <p:spPr/>
@@ -1151,7 +957,7 @@
 </file>
 
 <file path=ppt/notesSlides/notesSlide18.xml><?xml version="1.0" encoding="utf-8"?>
-<p:notes xmlns:a="http://schemas.openxmlformats.org/drawingml/2006/main" xmlns:p="http://schemas.openxmlformats.org/presentationml/2006/main" xmlns:r="http://schemas.openxmlformats.org/officeDocument/2006/relationships">
+<p:notes xmlns:a="http://schemas.openxmlformats.org/drawingml/2006/main" xmlns:r="http://schemas.openxmlformats.org/officeDocument/2006/relationships" xmlns:p="http://schemas.openxmlformats.org/presentationml/2006/main">
   <p:cSld>
     <p:spTree>
       <p:nvGrpSpPr>
@@ -1171,7 +977,7 @@
         <p:nvSpPr>
           <p:cNvPr id="2" name="Slide Image Placeholder 1"/>
           <p:cNvSpPr>
-            <a:spLocks noGrp="1"/>
+            <a:spLocks noGrp="1" noRot="1" noChangeAspect="1"/>
           </p:cNvSpPr>
           <p:nvPr>
             <p:ph type="sldImg" idx="2"/>
@@ -1186,7 +992,7 @@
             <a:spLocks noGrp="1"/>
           </p:cNvSpPr>
           <p:nvPr>
-            <p:ph type="body" idx="3" sz="quarter"/>
+            <p:ph type="body" sz="quarter" idx="3"/>
           </p:nvPr>
         </p:nvSpPr>
         <p:spPr/>
@@ -1207,7 +1013,7 @@
             <a:spLocks noGrp="1"/>
           </p:cNvSpPr>
           <p:nvPr>
-            <p:ph type="sldNum" idx="5" sz="quarter"/>
+            <p:ph type="sldNum" sz="quarter" idx="5"/>
           </p:nvPr>
         </p:nvSpPr>
         <p:spPr/>
@@ -1221,7 +1027,7 @@
 </file>
 
 <file path=ppt/notesSlides/notesSlide19.xml><?xml version="1.0" encoding="utf-8"?>
-<p:notes xmlns:a="http://schemas.openxmlformats.org/drawingml/2006/main" xmlns:p="http://schemas.openxmlformats.org/presentationml/2006/main" xmlns:r="http://schemas.openxmlformats.org/officeDocument/2006/relationships">
+<p:notes xmlns:a="http://schemas.openxmlformats.org/drawingml/2006/main" xmlns:r="http://schemas.openxmlformats.org/officeDocument/2006/relationships" xmlns:p="http://schemas.openxmlformats.org/presentationml/2006/main">
   <p:cSld>
     <p:spTree>
       <p:nvGrpSpPr>
@@ -1241,7 +1047,7 @@
         <p:nvSpPr>
           <p:cNvPr id="2" name="Slide Image Placeholder 1"/>
           <p:cNvSpPr>
-            <a:spLocks noGrp="1"/>
+            <a:spLocks noGrp="1" noRot="1" noChangeAspect="1"/>
           </p:cNvSpPr>
           <p:nvPr>
             <p:ph type="sldImg" idx="2"/>
@@ -1256,7 +1062,7 @@
             <a:spLocks noGrp="1"/>
           </p:cNvSpPr>
           <p:nvPr>
-            <p:ph type="body" idx="3" sz="quarter"/>
+            <p:ph type="body" sz="quarter" idx="3"/>
           </p:nvPr>
         </p:nvSpPr>
         <p:spPr/>
@@ -1268,7 +1074,9 @@
               <a:t>이상으로 보고를 마칩니다. 13,262행 전수 보존 전처리, 76.8시간의 실사 대기 병목과 원인 규명, 그리고 가정을 명시하고 실험 설계로 검증하는 TO-BE 시나리오까지 설명드렸습니다. 질문 주시면 답변드리겠습니다. 감사합니다.</a:t>
             </a:r>
           </a:p>
-          <a:p/>
+          <a:p>
+            <a:endParaRPr/>
+          </a:p>
           <a:p>
             <a:r>
               <a:t>[핵심 숫자 치트시트] 리드타임 105.9h · 대기 95.8h(90.5%) · 실사 대기 76.8h · 유입 134.3 vs CAPA 68.0 · 적체 403건 · 인계 6.6배 · OLS 실사 1.12h/h · 사내수리 +31.75h · 자재 30.5h · 재수리 26건 +32.9h · 사전 적중 E→사내 100.0%, P→즉시 83.1% · 감축 ▼14.5%</a:t>
@@ -1283,7 +1091,7 @@
             <a:spLocks noGrp="1"/>
           </p:cNvSpPr>
           <p:nvPr>
-            <p:ph type="sldNum" idx="5" sz="quarter"/>
+            <p:ph type="sldNum" sz="quarter" idx="5"/>
           </p:nvPr>
         </p:nvSpPr>
         <p:spPr/>
@@ -1297,7 +1105,7 @@
 </file>
 
 <file path=ppt/notesSlides/notesSlide2.xml><?xml version="1.0" encoding="utf-8"?>
-<p:notes xmlns:a="http://schemas.openxmlformats.org/drawingml/2006/main" xmlns:p="http://schemas.openxmlformats.org/presentationml/2006/main" xmlns:r="http://schemas.openxmlformats.org/officeDocument/2006/relationships">
+<p:notes xmlns:a="http://schemas.openxmlformats.org/drawingml/2006/main" xmlns:r="http://schemas.openxmlformats.org/officeDocument/2006/relationships" xmlns:p="http://schemas.openxmlformats.org/presentationml/2006/main">
   <p:cSld>
     <p:spTree>
       <p:nvGrpSpPr>
@@ -1317,7 +1125,7 @@
         <p:nvSpPr>
           <p:cNvPr id="2" name="Slide Image Placeholder 1"/>
           <p:cNvSpPr>
-            <a:spLocks noGrp="1"/>
+            <a:spLocks noGrp="1" noRot="1" noChangeAspect="1"/>
           </p:cNvSpPr>
           <p:nvPr>
             <p:ph type="sldImg" idx="2"/>
@@ -1332,7 +1140,7 @@
             <a:spLocks noGrp="1"/>
           </p:cNvSpPr>
           <p:nvPr>
-            <p:ph type="body" idx="3" sz="quarter"/>
+            <p:ph type="body" sz="quarter" idx="3"/>
           </p:nvPr>
         </p:nvSpPr>
         <p:spPr/>
@@ -1353,7 +1161,7 @@
             <a:spLocks noGrp="1"/>
           </p:cNvSpPr>
           <p:nvPr>
-            <p:ph type="sldNum" idx="5" sz="quarter"/>
+            <p:ph type="sldNum" sz="quarter" idx="5"/>
           </p:nvPr>
         </p:nvSpPr>
         <p:spPr/>
@@ -1367,7 +1175,7 @@
 </file>
 
 <file path=ppt/notesSlides/notesSlide3.xml><?xml version="1.0" encoding="utf-8"?>
-<p:notes xmlns:a="http://schemas.openxmlformats.org/drawingml/2006/main" xmlns:p="http://schemas.openxmlformats.org/presentationml/2006/main" xmlns:r="http://schemas.openxmlformats.org/officeDocument/2006/relationships">
+<p:notes xmlns:a="http://schemas.openxmlformats.org/drawingml/2006/main" xmlns:r="http://schemas.openxmlformats.org/officeDocument/2006/relationships" xmlns:p="http://schemas.openxmlformats.org/presentationml/2006/main">
   <p:cSld>
     <p:spTree>
       <p:nvGrpSpPr>
@@ -1387,7 +1195,7 @@
         <p:nvSpPr>
           <p:cNvPr id="2" name="Slide Image Placeholder 1"/>
           <p:cNvSpPr>
-            <a:spLocks noGrp="1"/>
+            <a:spLocks noGrp="1" noRot="1" noChangeAspect="1"/>
           </p:cNvSpPr>
           <p:nvPr>
             <p:ph type="sldImg" idx="2"/>
@@ -1402,7 +1210,7 @@
             <a:spLocks noGrp="1"/>
           </p:cNvSpPr>
           <p:nvPr>
-            <p:ph type="body" idx="3" sz="quarter"/>
+            <p:ph type="body" sz="quarter" idx="3"/>
           </p:nvPr>
         </p:nvSpPr>
         <p:spPr/>
@@ -1423,7 +1231,7 @@
             <a:spLocks noGrp="1"/>
           </p:cNvSpPr>
           <p:nvPr>
-            <p:ph type="sldNum" idx="5" sz="quarter"/>
+            <p:ph type="sldNum" sz="quarter" idx="5"/>
           </p:nvPr>
         </p:nvSpPr>
         <p:spPr/>
@@ -1437,7 +1245,7 @@
 </file>
 
 <file path=ppt/notesSlides/notesSlide4.xml><?xml version="1.0" encoding="utf-8"?>
-<p:notes xmlns:a="http://schemas.openxmlformats.org/drawingml/2006/main" xmlns:p="http://schemas.openxmlformats.org/presentationml/2006/main" xmlns:r="http://schemas.openxmlformats.org/officeDocument/2006/relationships">
+<p:notes xmlns:a="http://schemas.openxmlformats.org/drawingml/2006/main" xmlns:r="http://schemas.openxmlformats.org/officeDocument/2006/relationships" xmlns:p="http://schemas.openxmlformats.org/presentationml/2006/main">
   <p:cSld>
     <p:spTree>
       <p:nvGrpSpPr>
@@ -1457,7 +1265,7 @@
         <p:nvSpPr>
           <p:cNvPr id="2" name="Slide Image Placeholder 1"/>
           <p:cNvSpPr>
-            <a:spLocks noGrp="1"/>
+            <a:spLocks noGrp="1" noRot="1" noChangeAspect="1"/>
           </p:cNvSpPr>
           <p:nvPr>
             <p:ph type="sldImg" idx="2"/>
@@ -1472,7 +1280,7 @@
             <a:spLocks noGrp="1"/>
           </p:cNvSpPr>
           <p:nvPr>
-            <p:ph type="body" idx="3" sz="quarter"/>
+            <p:ph type="body" sz="quarter" idx="3"/>
           </p:nvPr>
         </p:nvSpPr>
         <p:spPr/>
@@ -1493,7 +1301,7 @@
             <a:spLocks noGrp="1"/>
           </p:cNvSpPr>
           <p:nvPr>
-            <p:ph type="sldNum" idx="5" sz="quarter"/>
+            <p:ph type="sldNum" sz="quarter" idx="5"/>
           </p:nvPr>
         </p:nvSpPr>
         <p:spPr/>
@@ -1507,7 +1315,7 @@
 </file>
 
 <file path=ppt/notesSlides/notesSlide5.xml><?xml version="1.0" encoding="utf-8"?>
-<p:notes xmlns:a="http://schemas.openxmlformats.org/drawingml/2006/main" xmlns:p="http://schemas.openxmlformats.org/presentationml/2006/main" xmlns:r="http://schemas.openxmlformats.org/officeDocument/2006/relationships">
+<p:notes xmlns:a="http://schemas.openxmlformats.org/drawingml/2006/main" xmlns:r="http://schemas.openxmlformats.org/officeDocument/2006/relationships" xmlns:p="http://schemas.openxmlformats.org/presentationml/2006/main">
   <p:cSld>
     <p:spTree>
       <p:nvGrpSpPr>
@@ -1527,7 +1335,7 @@
         <p:nvSpPr>
           <p:cNvPr id="2" name="Slide Image Placeholder 1"/>
           <p:cNvSpPr>
-            <a:spLocks noGrp="1"/>
+            <a:spLocks noGrp="1" noRot="1" noChangeAspect="1"/>
           </p:cNvSpPr>
           <p:nvPr>
             <p:ph type="sldImg" idx="2"/>
@@ -1542,7 +1350,7 @@
             <a:spLocks noGrp="1"/>
           </p:cNvSpPr>
           <p:nvPr>
-            <p:ph type="body" idx="3" sz="quarter"/>
+            <p:ph type="body" sz="quarter" idx="3"/>
           </p:nvPr>
         </p:nvSpPr>
         <p:spPr/>
@@ -1563,7 +1371,7 @@
             <a:spLocks noGrp="1"/>
           </p:cNvSpPr>
           <p:nvPr>
-            <p:ph type="sldNum" idx="5" sz="quarter"/>
+            <p:ph type="sldNum" sz="quarter" idx="5"/>
           </p:nvPr>
         </p:nvSpPr>
         <p:spPr/>
@@ -1577,7 +1385,7 @@
 </file>
 
 <file path=ppt/notesSlides/notesSlide6.xml><?xml version="1.0" encoding="utf-8"?>
-<p:notes xmlns:a="http://schemas.openxmlformats.org/drawingml/2006/main" xmlns:p="http://schemas.openxmlformats.org/presentationml/2006/main" xmlns:r="http://schemas.openxmlformats.org/officeDocument/2006/relationships">
+<p:notes xmlns:a="http://schemas.openxmlformats.org/drawingml/2006/main" xmlns:r="http://schemas.openxmlformats.org/officeDocument/2006/relationships" xmlns:p="http://schemas.openxmlformats.org/presentationml/2006/main">
   <p:cSld>
     <p:spTree>
       <p:nvGrpSpPr>
@@ -1597,7 +1405,7 @@
         <p:nvSpPr>
           <p:cNvPr id="2" name="Slide Image Placeholder 1"/>
           <p:cNvSpPr>
-            <a:spLocks noGrp="1"/>
+            <a:spLocks noGrp="1" noRot="1" noChangeAspect="1"/>
           </p:cNvSpPr>
           <p:nvPr>
             <p:ph type="sldImg" idx="2"/>
@@ -1612,7 +1420,7 @@
             <a:spLocks noGrp="1"/>
           </p:cNvSpPr>
           <p:nvPr>
-            <p:ph type="body" idx="3" sz="quarter"/>
+            <p:ph type="body" sz="quarter" idx="3"/>
           </p:nvPr>
         </p:nvSpPr>
         <p:spPr/>
@@ -1633,7 +1441,7 @@
             <a:spLocks noGrp="1"/>
           </p:cNvSpPr>
           <p:nvPr>
-            <p:ph type="sldNum" idx="5" sz="quarter"/>
+            <p:ph type="sldNum" sz="quarter" idx="5"/>
           </p:nvPr>
         </p:nvSpPr>
         <p:spPr/>
@@ -1647,7 +1455,7 @@
 </file>
 
 <file path=ppt/notesSlides/notesSlide7.xml><?xml version="1.0" encoding="utf-8"?>
-<p:notes xmlns:a="http://schemas.openxmlformats.org/drawingml/2006/main" xmlns:p="http://schemas.openxmlformats.org/presentationml/2006/main" xmlns:r="http://schemas.openxmlformats.org/officeDocument/2006/relationships">
+<p:notes xmlns:a="http://schemas.openxmlformats.org/drawingml/2006/main" xmlns:r="http://schemas.openxmlformats.org/officeDocument/2006/relationships" xmlns:p="http://schemas.openxmlformats.org/presentationml/2006/main">
   <p:cSld>
     <p:spTree>
       <p:nvGrpSpPr>
@@ -1667,7 +1475,7 @@
         <p:nvSpPr>
           <p:cNvPr id="2" name="Slide Image Placeholder 1"/>
           <p:cNvSpPr>
-            <a:spLocks noGrp="1"/>
+            <a:spLocks noGrp="1" noRot="1" noChangeAspect="1"/>
           </p:cNvSpPr>
           <p:nvPr>
             <p:ph type="sldImg" idx="2"/>
@@ -1682,7 +1490,7 @@
             <a:spLocks noGrp="1"/>
           </p:cNvSpPr>
           <p:nvPr>
-            <p:ph type="body" idx="3" sz="quarter"/>
+            <p:ph type="body" sz="quarter" idx="3"/>
           </p:nvPr>
         </p:nvSpPr>
         <p:spPr/>
@@ -1703,7 +1511,7 @@
             <a:spLocks noGrp="1"/>
           </p:cNvSpPr>
           <p:nvPr>
-            <p:ph type="sldNum" idx="5" sz="quarter"/>
+            <p:ph type="sldNum" sz="quarter" idx="5"/>
           </p:nvPr>
         </p:nvSpPr>
         <p:spPr/>
@@ -1717,7 +1525,7 @@
 </file>
 
 <file path=ppt/notesSlides/notesSlide8.xml><?xml version="1.0" encoding="utf-8"?>
-<p:notes xmlns:a="http://schemas.openxmlformats.org/drawingml/2006/main" xmlns:p="http://schemas.openxmlformats.org/presentationml/2006/main" xmlns:r="http://schemas.openxmlformats.org/officeDocument/2006/relationships">
+<p:notes xmlns:a="http://schemas.openxmlformats.org/drawingml/2006/main" xmlns:r="http://schemas.openxmlformats.org/officeDocument/2006/relationships" xmlns:p="http://schemas.openxmlformats.org/presentationml/2006/main">
   <p:cSld>
     <p:spTree>
       <p:nvGrpSpPr>
@@ -1737,7 +1545,7 @@
         <p:nvSpPr>
           <p:cNvPr id="2" name="Slide Image Placeholder 1"/>
           <p:cNvSpPr>
-            <a:spLocks noGrp="1"/>
+            <a:spLocks noGrp="1" noRot="1" noChangeAspect="1"/>
           </p:cNvSpPr>
           <p:nvPr>
             <p:ph type="sldImg" idx="2"/>
@@ -1752,7 +1560,7 @@
             <a:spLocks noGrp="1"/>
           </p:cNvSpPr>
           <p:nvPr>
-            <p:ph type="body" idx="3" sz="quarter"/>
+            <p:ph type="body" sz="quarter" idx="3"/>
           </p:nvPr>
         </p:nvSpPr>
         <p:spPr/>
@@ -1773,7 +1581,7 @@
             <a:spLocks noGrp="1"/>
           </p:cNvSpPr>
           <p:nvPr>
-            <p:ph type="sldNum" idx="5" sz="quarter"/>
+            <p:ph type="sldNum" sz="quarter" idx="5"/>
           </p:nvPr>
         </p:nvSpPr>
         <p:spPr/>
@@ -1787,7 +1595,7 @@
 </file>
 
 <file path=ppt/notesSlides/notesSlide9.xml><?xml version="1.0" encoding="utf-8"?>
-<p:notes xmlns:a="http://schemas.openxmlformats.org/drawingml/2006/main" xmlns:p="http://schemas.openxmlformats.org/presentationml/2006/main" xmlns:r="http://schemas.openxmlformats.org/officeDocument/2006/relationships">
+<p:notes xmlns:a="http://schemas.openxmlformats.org/drawingml/2006/main" xmlns:r="http://schemas.openxmlformats.org/officeDocument/2006/relationships" xmlns:p="http://schemas.openxmlformats.org/presentationml/2006/main">
   <p:cSld>
     <p:spTree>
       <p:nvGrpSpPr>
@@ -1807,7 +1615,7 @@
         <p:nvSpPr>
           <p:cNvPr id="2" name="Slide Image Placeholder 1"/>
           <p:cNvSpPr>
-            <a:spLocks noGrp="1"/>
+            <a:spLocks noGrp="1" noRot="1" noChangeAspect="1"/>
           </p:cNvSpPr>
           <p:nvPr>
             <p:ph type="sldImg" idx="2"/>
@@ -1822,7 +1630,7 @@
             <a:spLocks noGrp="1"/>
           </p:cNvSpPr>
           <p:nvPr>
-            <p:ph type="body" idx="3" sz="quarter"/>
+            <p:ph type="body" sz="quarter" idx="3"/>
           </p:nvPr>
         </p:nvSpPr>
         <p:spPr/>
@@ -1843,7 +1651,7 @@
             <a:spLocks noGrp="1"/>
           </p:cNvSpPr>
           <p:nvPr>
-            <p:ph type="sldNum" idx="5" sz="quarter"/>
+            <p:ph type="sldNum" sz="quarter" idx="5"/>
           </p:nvPr>
         </p:nvSpPr>
         <p:spPr/>
@@ -1894,10 +1702,9 @@
           <a:lstStyle/>
           <a:p>
             <a:r>
-              <a:rPr lang="en-US" smtClean="0"/>
+              <a:rPr lang="en-US"/>
               <a:t>Click to edit Master title style</a:t>
             </a:r>
-            <a:endParaRPr lang="en-US"/>
           </a:p>
         </p:txBody>
       </p:sp>
@@ -2013,10 +1820,9 @@
           </a:lstStyle>
           <a:p>
             <a:r>
-              <a:rPr lang="en-US" smtClean="0"/>
+              <a:rPr lang="en-US"/>
               <a:t>Click to edit Master subtitle style</a:t>
             </a:r>
-            <a:endParaRPr lang="en-US"/>
           </a:p>
         </p:txBody>
       </p:sp>
@@ -2037,7 +1843,7 @@
           <a:p>
             <a:fld id="{5BCAD085-E8A6-8845-BD4E-CB4CCA059FC4}" type="datetimeFigureOut">
               <a:rPr lang="en-US" smtClean="0"/>
-              <a:t>1/27/13</a:t>
+              <a:t>10/27/2026</a:t>
             </a:fld>
             <a:endParaRPr lang="en-US"/>
           </a:p>
@@ -2131,10 +1937,9 @@
           <a:lstStyle/>
           <a:p>
             <a:r>
-              <a:rPr lang="en-US" smtClean="0"/>
+              <a:rPr lang="en-US"/>
               <a:t>Click to edit Master title style</a:t>
             </a:r>
-            <a:endParaRPr lang="en-US"/>
           </a:p>
         </p:txBody>
       </p:sp>
@@ -2155,38 +1960,37 @@
           <a:p>
             <a:pPr lvl="0"/>
             <a:r>
-              <a:rPr lang="en-US" smtClean="0"/>
+              <a:rPr lang="en-US"/>
               <a:t>Click to edit Master text styles</a:t>
             </a:r>
           </a:p>
           <a:p>
             <a:pPr lvl="1"/>
             <a:r>
-              <a:rPr lang="en-US" smtClean="0"/>
+              <a:rPr lang="en-US"/>
               <a:t>Second level</a:t>
             </a:r>
           </a:p>
           <a:p>
             <a:pPr lvl="2"/>
             <a:r>
-              <a:rPr lang="en-US" smtClean="0"/>
+              <a:rPr lang="en-US"/>
               <a:t>Third level</a:t>
             </a:r>
           </a:p>
           <a:p>
             <a:pPr lvl="3"/>
             <a:r>
-              <a:rPr lang="en-US" smtClean="0"/>
+              <a:rPr lang="en-US"/>
               <a:t>Fourth level</a:t>
             </a:r>
           </a:p>
           <a:p>
             <a:pPr lvl="4"/>
             <a:r>
-              <a:rPr lang="en-US" smtClean="0"/>
+              <a:rPr lang="en-US"/>
               <a:t>Fifth level</a:t>
             </a:r>
-            <a:endParaRPr lang="en-US"/>
           </a:p>
         </p:txBody>
       </p:sp>
@@ -2207,7 +2011,7 @@
           <a:p>
             <a:fld id="{5BCAD085-E8A6-8845-BD4E-CB4CCA059FC4}" type="datetimeFigureOut">
               <a:rPr lang="en-US" smtClean="0"/>
-              <a:t>1/27/13</a:t>
+              <a:t>10/27/2026</a:t>
             </a:fld>
             <a:endParaRPr lang="en-US"/>
           </a:p>
@@ -2306,10 +2110,9 @@
           <a:lstStyle/>
           <a:p>
             <a:r>
-              <a:rPr lang="en-US" smtClean="0"/>
+              <a:rPr lang="en-US"/>
               <a:t>Click to edit Master title style</a:t>
             </a:r>
-            <a:endParaRPr lang="en-US"/>
           </a:p>
         </p:txBody>
       </p:sp>
@@ -2335,38 +2138,37 @@
           <a:p>
             <a:pPr lvl="0"/>
             <a:r>
-              <a:rPr lang="en-US" smtClean="0"/>
+              <a:rPr lang="en-US"/>
               <a:t>Click to edit Master text styles</a:t>
             </a:r>
           </a:p>
           <a:p>
             <a:pPr lvl="1"/>
             <a:r>
-              <a:rPr lang="en-US" smtClean="0"/>
+              <a:rPr lang="en-US"/>
               <a:t>Second level</a:t>
             </a:r>
           </a:p>
           <a:p>
             <a:pPr lvl="2"/>
             <a:r>
-              <a:rPr lang="en-US" smtClean="0"/>
+              <a:rPr lang="en-US"/>
               <a:t>Third level</a:t>
             </a:r>
           </a:p>
           <a:p>
             <a:pPr lvl="3"/>
             <a:r>
-              <a:rPr lang="en-US" smtClean="0"/>
+              <a:rPr lang="en-US"/>
               <a:t>Fourth level</a:t>
             </a:r>
           </a:p>
           <a:p>
             <a:pPr lvl="4"/>
             <a:r>
-              <a:rPr lang="en-US" smtClean="0"/>
+              <a:rPr lang="en-US"/>
               <a:t>Fifth level</a:t>
             </a:r>
-            <a:endParaRPr lang="en-US"/>
           </a:p>
         </p:txBody>
       </p:sp>
@@ -2387,7 +2189,7 @@
           <a:p>
             <a:fld id="{5BCAD085-E8A6-8845-BD4E-CB4CCA059FC4}" type="datetimeFigureOut">
               <a:rPr lang="en-US" smtClean="0"/>
-              <a:t>1/27/13</a:t>
+              <a:t>10/27/2026</a:t>
             </a:fld>
             <a:endParaRPr lang="en-US"/>
           </a:p>
@@ -2481,10 +2283,9 @@
           <a:lstStyle/>
           <a:p>
             <a:r>
-              <a:rPr lang="en-US" smtClean="0"/>
+              <a:rPr lang="en-US"/>
               <a:t>Click to edit Master title style</a:t>
             </a:r>
-            <a:endParaRPr lang="en-US"/>
           </a:p>
         </p:txBody>
       </p:sp>
@@ -2505,38 +2306,37 @@
           <a:p>
             <a:pPr lvl="0"/>
             <a:r>
-              <a:rPr lang="en-US" smtClean="0"/>
+              <a:rPr lang="en-US"/>
               <a:t>Click to edit Master text styles</a:t>
             </a:r>
           </a:p>
           <a:p>
             <a:pPr lvl="1"/>
             <a:r>
-              <a:rPr lang="en-US" smtClean="0"/>
+              <a:rPr lang="en-US"/>
               <a:t>Second level</a:t>
             </a:r>
           </a:p>
           <a:p>
             <a:pPr lvl="2"/>
             <a:r>
-              <a:rPr lang="en-US" smtClean="0"/>
+              <a:rPr lang="en-US"/>
               <a:t>Third level</a:t>
             </a:r>
           </a:p>
           <a:p>
             <a:pPr lvl="3"/>
             <a:r>
-              <a:rPr lang="en-US" smtClean="0"/>
+              <a:rPr lang="en-US"/>
               <a:t>Fourth level</a:t>
             </a:r>
           </a:p>
           <a:p>
             <a:pPr lvl="4"/>
             <a:r>
-              <a:rPr lang="en-US" smtClean="0"/>
+              <a:rPr lang="en-US"/>
               <a:t>Fifth level</a:t>
             </a:r>
-            <a:endParaRPr lang="en-US"/>
           </a:p>
         </p:txBody>
       </p:sp>
@@ -2557,7 +2357,7 @@
           <a:p>
             <a:fld id="{5BCAD085-E8A6-8845-BD4E-CB4CCA059FC4}" type="datetimeFigureOut">
               <a:rPr lang="en-US" smtClean="0"/>
-              <a:t>1/27/13</a:t>
+              <a:t>10/27/2026</a:t>
             </a:fld>
             <a:endParaRPr lang="en-US"/>
           </a:p>
@@ -2660,10 +2460,9 @@
           </a:lstStyle>
           <a:p>
             <a:r>
-              <a:rPr lang="en-US" smtClean="0"/>
+              <a:rPr lang="en-US"/>
               <a:t>Click to edit Master title style</a:t>
             </a:r>
-            <a:endParaRPr lang="en-US"/>
           </a:p>
         </p:txBody>
       </p:sp>
@@ -2780,7 +2579,7 @@
           <a:p>
             <a:pPr lvl="0"/>
             <a:r>
-              <a:rPr lang="en-US" smtClean="0"/>
+              <a:rPr lang="en-US"/>
               <a:t>Click to edit Master text styles</a:t>
             </a:r>
           </a:p>
@@ -2803,7 +2602,7 @@
           <a:p>
             <a:fld id="{5BCAD085-E8A6-8845-BD4E-CB4CCA059FC4}" type="datetimeFigureOut">
               <a:rPr lang="en-US" smtClean="0"/>
-              <a:t>1/27/13</a:t>
+              <a:t>10/27/2026</a:t>
             </a:fld>
             <a:endParaRPr lang="en-US"/>
           </a:p>
@@ -2897,10 +2696,9 @@
           <a:lstStyle/>
           <a:p>
             <a:r>
-              <a:rPr lang="en-US" smtClean="0"/>
+              <a:rPr lang="en-US"/>
               <a:t>Click to edit Master title style</a:t>
             </a:r>
-            <a:endParaRPr lang="en-US"/>
           </a:p>
         </p:txBody>
       </p:sp>
@@ -2954,38 +2752,37 @@
           <a:p>
             <a:pPr lvl="0"/>
             <a:r>
-              <a:rPr lang="en-US" smtClean="0"/>
+              <a:rPr lang="en-US"/>
               <a:t>Click to edit Master text styles</a:t>
             </a:r>
           </a:p>
           <a:p>
             <a:pPr lvl="1"/>
             <a:r>
-              <a:rPr lang="en-US" smtClean="0"/>
+              <a:rPr lang="en-US"/>
               <a:t>Second level</a:t>
             </a:r>
           </a:p>
           <a:p>
             <a:pPr lvl="2"/>
             <a:r>
-              <a:rPr lang="en-US" smtClean="0"/>
+              <a:rPr lang="en-US"/>
               <a:t>Third level</a:t>
             </a:r>
           </a:p>
           <a:p>
             <a:pPr lvl="3"/>
             <a:r>
-              <a:rPr lang="en-US" smtClean="0"/>
+              <a:rPr lang="en-US"/>
               <a:t>Fourth level</a:t>
             </a:r>
           </a:p>
           <a:p>
             <a:pPr lvl="4"/>
             <a:r>
-              <a:rPr lang="en-US" smtClean="0"/>
+              <a:rPr lang="en-US"/>
               <a:t>Fifth level</a:t>
             </a:r>
-            <a:endParaRPr lang="en-US"/>
           </a:p>
         </p:txBody>
       </p:sp>
@@ -3039,38 +2836,37 @@
           <a:p>
             <a:pPr lvl="0"/>
             <a:r>
-              <a:rPr lang="en-US" smtClean="0"/>
+              <a:rPr lang="en-US"/>
               <a:t>Click to edit Master text styles</a:t>
             </a:r>
           </a:p>
           <a:p>
             <a:pPr lvl="1"/>
             <a:r>
-              <a:rPr lang="en-US" smtClean="0"/>
+              <a:rPr lang="en-US"/>
               <a:t>Second level</a:t>
             </a:r>
           </a:p>
           <a:p>
             <a:pPr lvl="2"/>
             <a:r>
-              <a:rPr lang="en-US" smtClean="0"/>
+              <a:rPr lang="en-US"/>
               <a:t>Third level</a:t>
             </a:r>
           </a:p>
           <a:p>
             <a:pPr lvl="3"/>
             <a:r>
-              <a:rPr lang="en-US" smtClean="0"/>
+              <a:rPr lang="en-US"/>
               <a:t>Fourth level</a:t>
             </a:r>
           </a:p>
           <a:p>
             <a:pPr lvl="4"/>
             <a:r>
-              <a:rPr lang="en-US" smtClean="0"/>
+              <a:rPr lang="en-US"/>
               <a:t>Fifth level</a:t>
             </a:r>
-            <a:endParaRPr lang="en-US"/>
           </a:p>
         </p:txBody>
       </p:sp>
@@ -3091,7 +2887,7 @@
           <a:p>
             <a:fld id="{5BCAD085-E8A6-8845-BD4E-CB4CCA059FC4}" type="datetimeFigureOut">
               <a:rPr lang="en-US" smtClean="0"/>
-              <a:t>1/27/13</a:t>
+              <a:t>10/27/2026</a:t>
             </a:fld>
             <a:endParaRPr lang="en-US"/>
           </a:p>
@@ -3189,10 +2985,9 @@
           </a:lstStyle>
           <a:p>
             <a:r>
-              <a:rPr lang="en-US" smtClean="0"/>
+              <a:rPr lang="en-US"/>
               <a:t>Click to edit Master title style</a:t>
             </a:r>
-            <a:endParaRPr lang="en-US"/>
           </a:p>
         </p:txBody>
       </p:sp>
@@ -3255,7 +3050,7 @@
           <a:p>
             <a:pPr lvl="0"/>
             <a:r>
-              <a:rPr lang="en-US" smtClean="0"/>
+              <a:rPr lang="en-US"/>
               <a:t>Click to edit Master text styles</a:t>
             </a:r>
           </a:p>
@@ -3311,38 +3106,37 @@
           <a:p>
             <a:pPr lvl="0"/>
             <a:r>
-              <a:rPr lang="en-US" smtClean="0"/>
+              <a:rPr lang="en-US"/>
               <a:t>Click to edit Master text styles</a:t>
             </a:r>
           </a:p>
           <a:p>
             <a:pPr lvl="1"/>
             <a:r>
-              <a:rPr lang="en-US" smtClean="0"/>
+              <a:rPr lang="en-US"/>
               <a:t>Second level</a:t>
             </a:r>
           </a:p>
           <a:p>
             <a:pPr lvl="2"/>
             <a:r>
-              <a:rPr lang="en-US" smtClean="0"/>
+              <a:rPr lang="en-US"/>
               <a:t>Third level</a:t>
             </a:r>
           </a:p>
           <a:p>
             <a:pPr lvl="3"/>
             <a:r>
-              <a:rPr lang="en-US" smtClean="0"/>
+              <a:rPr lang="en-US"/>
               <a:t>Fourth level</a:t>
             </a:r>
           </a:p>
           <a:p>
             <a:pPr lvl="4"/>
             <a:r>
-              <a:rPr lang="en-US" smtClean="0"/>
+              <a:rPr lang="en-US"/>
               <a:t>Fifth level</a:t>
             </a:r>
-            <a:endParaRPr lang="en-US"/>
           </a:p>
         </p:txBody>
       </p:sp>
@@ -3405,7 +3199,7 @@
           <a:p>
             <a:pPr lvl="0"/>
             <a:r>
-              <a:rPr lang="en-US" smtClean="0"/>
+              <a:rPr lang="en-US"/>
               <a:t>Click to edit Master text styles</a:t>
             </a:r>
           </a:p>
@@ -3461,38 +3255,37 @@
           <a:p>
             <a:pPr lvl="0"/>
             <a:r>
-              <a:rPr lang="en-US" smtClean="0"/>
+              <a:rPr lang="en-US"/>
               <a:t>Click to edit Master text styles</a:t>
             </a:r>
           </a:p>
           <a:p>
             <a:pPr lvl="1"/>
             <a:r>
-              <a:rPr lang="en-US" smtClean="0"/>
+              <a:rPr lang="en-US"/>
               <a:t>Second level</a:t>
             </a:r>
           </a:p>
           <a:p>
             <a:pPr lvl="2"/>
             <a:r>
-              <a:rPr lang="en-US" smtClean="0"/>
+              <a:rPr lang="en-US"/>
               <a:t>Third level</a:t>
             </a:r>
           </a:p>
           <a:p>
             <a:pPr lvl="3"/>
             <a:r>
-              <a:rPr lang="en-US" smtClean="0"/>
+              <a:rPr lang="en-US"/>
               <a:t>Fourth level</a:t>
             </a:r>
           </a:p>
           <a:p>
             <a:pPr lvl="4"/>
             <a:r>
-              <a:rPr lang="en-US" smtClean="0"/>
+              <a:rPr lang="en-US"/>
               <a:t>Fifth level</a:t>
             </a:r>
-            <a:endParaRPr lang="en-US"/>
           </a:p>
         </p:txBody>
       </p:sp>
@@ -3513,7 +3306,7 @@
           <a:p>
             <a:fld id="{5BCAD085-E8A6-8845-BD4E-CB4CCA059FC4}" type="datetimeFigureOut">
               <a:rPr lang="en-US" smtClean="0"/>
-              <a:t>1/27/13</a:t>
+              <a:t>10/27/2026</a:t>
             </a:fld>
             <a:endParaRPr lang="en-US"/>
           </a:p>
@@ -3607,10 +3400,9 @@
           <a:lstStyle/>
           <a:p>
             <a:r>
-              <a:rPr lang="en-US" smtClean="0"/>
+              <a:rPr lang="en-US"/>
               <a:t>Click to edit Master title style</a:t>
             </a:r>
-            <a:endParaRPr lang="en-US"/>
           </a:p>
         </p:txBody>
       </p:sp>
@@ -3631,7 +3423,7 @@
           <a:p>
             <a:fld id="{5BCAD085-E8A6-8845-BD4E-CB4CCA059FC4}" type="datetimeFigureOut">
               <a:rPr lang="en-US" smtClean="0"/>
-              <a:t>1/27/13</a:t>
+              <a:t>10/27/2026</a:t>
             </a:fld>
             <a:endParaRPr lang="en-US"/>
           </a:p>
@@ -3726,7 +3518,7 @@
           <a:p>
             <a:fld id="{5BCAD085-E8A6-8845-BD4E-CB4CCA059FC4}" type="datetimeFigureOut">
               <a:rPr lang="en-US" smtClean="0"/>
-              <a:t>1/27/13</a:t>
+              <a:t>10/27/2026</a:t>
             </a:fld>
             <a:endParaRPr lang="en-US"/>
           </a:p>
@@ -3829,10 +3621,9 @@
           </a:lstStyle>
           <a:p>
             <a:r>
-              <a:rPr lang="en-US" smtClean="0"/>
+              <a:rPr lang="en-US"/>
               <a:t>Click to edit Master title style</a:t>
             </a:r>
-            <a:endParaRPr lang="en-US"/>
           </a:p>
         </p:txBody>
       </p:sp>
@@ -3886,38 +3677,37 @@
           <a:p>
             <a:pPr lvl="0"/>
             <a:r>
-              <a:rPr lang="en-US" smtClean="0"/>
+              <a:rPr lang="en-US"/>
               <a:t>Click to edit Master text styles</a:t>
             </a:r>
           </a:p>
           <a:p>
             <a:pPr lvl="1"/>
             <a:r>
-              <a:rPr lang="en-US" smtClean="0"/>
+              <a:rPr lang="en-US"/>
               <a:t>Second level</a:t>
             </a:r>
           </a:p>
           <a:p>
             <a:pPr lvl="2"/>
             <a:r>
-              <a:rPr lang="en-US" smtClean="0"/>
+              <a:rPr lang="en-US"/>
               <a:t>Third level</a:t>
             </a:r>
           </a:p>
           <a:p>
             <a:pPr lvl="3"/>
             <a:r>
-              <a:rPr lang="en-US" smtClean="0"/>
+              <a:rPr lang="en-US"/>
               <a:t>Fourth level</a:t>
             </a:r>
           </a:p>
           <a:p>
             <a:pPr lvl="4"/>
             <a:r>
-              <a:rPr lang="en-US" smtClean="0"/>
+              <a:rPr lang="en-US"/>
               <a:t>Fifth level</a:t>
             </a:r>
-            <a:endParaRPr lang="en-US"/>
           </a:p>
         </p:txBody>
       </p:sp>
@@ -3980,7 +3770,7 @@
           <a:p>
             <a:pPr lvl="0"/>
             <a:r>
-              <a:rPr lang="en-US" smtClean="0"/>
+              <a:rPr lang="en-US"/>
               <a:t>Click to edit Master text styles</a:t>
             </a:r>
           </a:p>
@@ -4003,7 +3793,7 @@
           <a:p>
             <a:fld id="{5BCAD085-E8A6-8845-BD4E-CB4CCA059FC4}" type="datetimeFigureOut">
               <a:rPr lang="en-US" smtClean="0"/>
-              <a:t>1/27/13</a:t>
+              <a:t>10/27/2026</a:t>
             </a:fld>
             <a:endParaRPr lang="en-US"/>
           </a:p>
@@ -4106,10 +3896,9 @@
           </a:lstStyle>
           <a:p>
             <a:r>
-              <a:rPr lang="en-US" smtClean="0"/>
+              <a:rPr lang="en-US"/>
               <a:t>Click to edit Master title style</a:t>
             </a:r>
-            <a:endParaRPr lang="en-US"/>
           </a:p>
         </p:txBody>
       </p:sp>
@@ -4233,7 +4022,7 @@
           <a:p>
             <a:pPr lvl="0"/>
             <a:r>
-              <a:rPr lang="en-US" smtClean="0"/>
+              <a:rPr lang="en-US"/>
               <a:t>Click to edit Master text styles</a:t>
             </a:r>
           </a:p>
@@ -4256,7 +4045,7 @@
           <a:p>
             <a:fld id="{5BCAD085-E8A6-8845-BD4E-CB4CCA059FC4}" type="datetimeFigureOut">
               <a:rPr lang="en-US" smtClean="0"/>
-              <a:t>1/27/13</a:t>
+              <a:t>10/27/2026</a:t>
             </a:fld>
             <a:endParaRPr lang="en-US"/>
           </a:p>
@@ -4365,10 +4154,9 @@
           <a:lstStyle/>
           <a:p>
             <a:r>
-              <a:rPr lang="en-US" smtClean="0"/>
+              <a:rPr lang="en-US"/>
               <a:t>Click to edit Master title style</a:t>
             </a:r>
-            <a:endParaRPr lang="en-US"/>
           </a:p>
         </p:txBody>
       </p:sp>
@@ -4399,38 +4187,37 @@
           <a:p>
             <a:pPr lvl="0"/>
             <a:r>
-              <a:rPr lang="en-US" smtClean="0"/>
+              <a:rPr lang="en-US"/>
               <a:t>Click to edit Master text styles</a:t>
             </a:r>
           </a:p>
           <a:p>
             <a:pPr lvl="1"/>
             <a:r>
-              <a:rPr lang="en-US" smtClean="0"/>
+              <a:rPr lang="en-US"/>
               <a:t>Second level</a:t>
             </a:r>
           </a:p>
           <a:p>
             <a:pPr lvl="2"/>
             <a:r>
-              <a:rPr lang="en-US" smtClean="0"/>
+              <a:rPr lang="en-US"/>
               <a:t>Third level</a:t>
             </a:r>
           </a:p>
           <a:p>
             <a:pPr lvl="3"/>
             <a:r>
-              <a:rPr lang="en-US" smtClean="0"/>
+              <a:rPr lang="en-US"/>
               <a:t>Fourth level</a:t>
             </a:r>
           </a:p>
           <a:p>
             <a:pPr lvl="4"/>
             <a:r>
-              <a:rPr lang="en-US" smtClean="0"/>
+              <a:rPr lang="en-US"/>
               <a:t>Fifth level</a:t>
             </a:r>
-            <a:endParaRPr lang="en-US"/>
           </a:p>
         </p:txBody>
       </p:sp>
@@ -4469,7 +4256,7 @@
           <a:p>
             <a:fld id="{5BCAD085-E8A6-8845-BD4E-CB4CCA059FC4}" type="datetimeFigureOut">
               <a:rPr lang="en-US" smtClean="0"/>
-              <a:t>1/27/13</a:t>
+              <a:t>10/27/2026</a:t>
             </a:fld>
             <a:endParaRPr lang="en-US"/>
           </a:p>
@@ -4828,7 +4615,7 @@
 </file>
 
 <file path=ppt/slides/slide1.xml><?xml version="1.0" encoding="utf-8"?>
-<p:sld xmlns:a="http://schemas.openxmlformats.org/drawingml/2006/main" xmlns:p="http://schemas.openxmlformats.org/presentationml/2006/main" xmlns:r="http://schemas.openxmlformats.org/officeDocument/2006/relationships">
+<p:sld xmlns:a="http://schemas.openxmlformats.org/drawingml/2006/main" xmlns:r="http://schemas.openxmlformats.org/officeDocument/2006/relationships" xmlns:p="http://schemas.openxmlformats.org/presentationml/2006/main">
   <p:cSld>
     <p:bg>
       <p:bgPr>
@@ -4844,7 +4631,14 @@
         <p:cNvGrpSpPr/>
         <p:nvPr/>
       </p:nvGrpSpPr>
-      <p:grpSpPr/>
+      <p:grpSpPr>
+        <a:xfrm>
+          <a:off x="0" y="0"/>
+          <a:ext cx="0" cy="0"/>
+          <a:chOff x="0" y="0"/>
+          <a:chExt cx="0" cy="0"/>
+        </a:xfrm>
+      </p:grpSpPr>
       <p:sp>
         <p:nvSpPr>
           <p:cNvPr id="2" name="tag:L1:tag"/>
@@ -5090,6 +4884,7 @@
           <a:lstStyle/>
           <a:p>
             <a:pPr algn="ctr"/>
+            <a:endParaRPr/>
           </a:p>
         </p:txBody>
       </p:sp>
@@ -5528,7 +5323,7 @@
 </file>
 
 <file path=ppt/slides/slide10.xml><?xml version="1.0" encoding="utf-8"?>
-<p:sld xmlns:a="http://schemas.openxmlformats.org/drawingml/2006/main" xmlns:p="http://schemas.openxmlformats.org/presentationml/2006/main" xmlns:r="http://schemas.openxmlformats.org/officeDocument/2006/relationships">
+<p:sld xmlns:a="http://schemas.openxmlformats.org/drawingml/2006/main" xmlns:r="http://schemas.openxmlformats.org/officeDocument/2006/relationships" xmlns:p="http://schemas.openxmlformats.org/presentationml/2006/main">
   <p:cSld>
     <p:bg>
       <p:bgPr>
@@ -5544,7 +5339,14 @@
         <p:cNvGrpSpPr/>
         <p:nvPr/>
       </p:nvGrpSpPr>
-      <p:grpSpPr/>
+      <p:grpSpPr>
+        <a:xfrm>
+          <a:off x="0" y="0"/>
+          <a:ext cx="0" cy="0"/>
+          <a:chOff x="0" y="0"/>
+          <a:chExt cx="0" cy="0"/>
+        </a:xfrm>
+      </p:grpSpPr>
       <p:sp>
         <p:nvSpPr>
           <p:cNvPr id="2" name="tag:L1:tag"/>
@@ -5879,6 +5681,7 @@
           <a:lstStyle/>
           <a:p>
             <a:pPr algn="ctr"/>
+            <a:endParaRPr/>
           </a:p>
         </p:txBody>
       </p:sp>
@@ -5936,15 +5739,15 @@
           <p:nvPr/>
         </p:nvPicPr>
         <p:blipFill>
-          <a:blip r:embed="rId2"/>
+          <a:blip r:embed="rId3"/>
           <a:stretch>
             <a:fillRect/>
           </a:stretch>
         </p:blipFill>
         <p:spPr>
           <a:xfrm>
-            <a:off x="703646" y="1896110"/>
-            <a:ext cx="4856346" cy="4142232"/>
+            <a:off x="843092" y="1896110"/>
+            <a:ext cx="4577454" cy="4142232"/>
           </a:xfrm>
           <a:prstGeom prst="rect">
             <a:avLst/>
@@ -5994,6 +5797,7 @@
           <a:lstStyle/>
           <a:p>
             <a:pPr algn="ctr"/>
+            <a:endParaRPr/>
           </a:p>
         </p:txBody>
       </p:sp>
@@ -6175,6 +5979,7 @@
           <a:lstStyle/>
           <a:p>
             <a:pPr algn="ctr"/>
+            <a:endParaRPr/>
           </a:p>
         </p:txBody>
       </p:sp>
@@ -6356,6 +6161,7 @@
           <a:lstStyle/>
           <a:p>
             <a:pPr algn="ctr"/>
+            <a:endParaRPr/>
           </a:p>
         </p:txBody>
       </p:sp>
@@ -6537,6 +6343,7 @@
           <a:lstStyle/>
           <a:p>
             <a:pPr algn="ctr"/>
+            <a:endParaRPr/>
           </a:p>
         </p:txBody>
       </p:sp>
@@ -6684,7 +6491,7 @@
 </file>
 
 <file path=ppt/slides/slide11.xml><?xml version="1.0" encoding="utf-8"?>
-<p:sld xmlns:a="http://schemas.openxmlformats.org/drawingml/2006/main" xmlns:p="http://schemas.openxmlformats.org/presentationml/2006/main" xmlns:r="http://schemas.openxmlformats.org/officeDocument/2006/relationships">
+<p:sld xmlns:a="http://schemas.openxmlformats.org/drawingml/2006/main" xmlns:r="http://schemas.openxmlformats.org/officeDocument/2006/relationships" xmlns:p="http://schemas.openxmlformats.org/presentationml/2006/main">
   <p:cSld>
     <p:bg>
       <p:bgPr>
@@ -6700,7 +6507,14 @@
         <p:cNvGrpSpPr/>
         <p:nvPr/>
       </p:nvGrpSpPr>
-      <p:grpSpPr/>
+      <p:grpSpPr>
+        <a:xfrm>
+          <a:off x="0" y="0"/>
+          <a:ext cx="0" cy="0"/>
+          <a:chOff x="0" y="0"/>
+          <a:chExt cx="0" cy="0"/>
+        </a:xfrm>
+      </p:grpSpPr>
       <p:sp>
         <p:nvSpPr>
           <p:cNvPr id="2" name="tag:L1:tag"/>
@@ -7035,6 +6849,7 @@
           <a:lstStyle/>
           <a:p>
             <a:pPr algn="ctr"/>
+            <a:endParaRPr/>
           </a:p>
         </p:txBody>
       </p:sp>
@@ -7092,7 +6907,7 @@
           <p:nvPr/>
         </p:nvPicPr>
         <p:blipFill>
-          <a:blip r:embed="rId2"/>
+          <a:blip r:embed="rId3"/>
           <a:stretch>
             <a:fillRect/>
           </a:stretch>
@@ -7150,6 +6965,7 @@
           <a:lstStyle/>
           <a:p>
             <a:pPr algn="ctr"/>
+            <a:endParaRPr/>
           </a:p>
         </p:txBody>
       </p:sp>
@@ -7342,6 +7158,7 @@
           <a:lstStyle/>
           <a:p>
             <a:pPr algn="ctr"/>
+            <a:endParaRPr/>
           </a:p>
         </p:txBody>
       </p:sp>
@@ -7534,6 +7351,7 @@
           <a:lstStyle/>
           <a:p>
             <a:pPr algn="ctr"/>
+            <a:endParaRPr/>
           </a:p>
         </p:txBody>
       </p:sp>
@@ -7726,6 +7544,7 @@
           <a:lstStyle/>
           <a:p>
             <a:pPr algn="ctr"/>
+            <a:endParaRPr/>
           </a:p>
         </p:txBody>
       </p:sp>
@@ -7827,7 +7646,7 @@
 </file>
 
 <file path=ppt/slides/slide12.xml><?xml version="1.0" encoding="utf-8"?>
-<p:sld xmlns:a="http://schemas.openxmlformats.org/drawingml/2006/main" xmlns:p="http://schemas.openxmlformats.org/presentationml/2006/main" xmlns:r="http://schemas.openxmlformats.org/officeDocument/2006/relationships">
+<p:sld xmlns:a="http://schemas.openxmlformats.org/drawingml/2006/main" xmlns:r="http://schemas.openxmlformats.org/officeDocument/2006/relationships" xmlns:p="http://schemas.openxmlformats.org/presentationml/2006/main">
   <p:cSld>
     <p:bg>
       <p:bgPr>
@@ -7843,7 +7662,14 @@
         <p:cNvGrpSpPr/>
         <p:nvPr/>
       </p:nvGrpSpPr>
-      <p:grpSpPr/>
+      <p:grpSpPr>
+        <a:xfrm>
+          <a:off x="0" y="0"/>
+          <a:ext cx="0" cy="0"/>
+          <a:chOff x="0" y="0"/>
+          <a:chExt cx="0" cy="0"/>
+        </a:xfrm>
+      </p:grpSpPr>
       <p:sp>
         <p:nvSpPr>
           <p:cNvPr id="2" name="tag:L1:tag"/>
@@ -8178,6 +8004,7 @@
           <a:lstStyle/>
           <a:p>
             <a:pPr algn="ctr"/>
+            <a:endParaRPr/>
           </a:p>
         </p:txBody>
       </p:sp>
@@ -8235,7 +8062,7 @@
           <p:nvPr/>
         </p:nvPicPr>
         <p:blipFill>
-          <a:blip r:embed="rId2"/>
+          <a:blip r:embed="rId3"/>
           <a:stretch>
             <a:fillRect/>
           </a:stretch>
@@ -8293,6 +8120,7 @@
           <a:lstStyle/>
           <a:p>
             <a:pPr algn="ctr"/>
+            <a:endParaRPr/>
           </a:p>
         </p:txBody>
       </p:sp>
@@ -8528,6 +8356,7 @@
           <a:lstStyle/>
           <a:p>
             <a:pPr algn="ctr"/>
+            <a:endParaRPr/>
           </a:p>
         </p:txBody>
       </p:sp>
@@ -8572,6 +8401,7 @@
           <a:lstStyle/>
           <a:p>
             <a:pPr algn="ctr"/>
+            <a:endParaRPr/>
           </a:p>
         </p:txBody>
       </p:sp>
@@ -8618,6 +8448,7 @@
           <a:lstStyle/>
           <a:p>
             <a:pPr algn="ctr"/>
+            <a:endParaRPr/>
           </a:p>
         </p:txBody>
       </p:sp>
@@ -8853,6 +8684,7 @@
           <a:lstStyle/>
           <a:p>
             <a:pPr algn="ctr"/>
+            <a:endParaRPr/>
           </a:p>
         </p:txBody>
       </p:sp>
@@ -8897,6 +8729,7 @@
           <a:lstStyle/>
           <a:p>
             <a:pPr algn="ctr"/>
+            <a:endParaRPr/>
           </a:p>
         </p:txBody>
       </p:sp>
@@ -8943,6 +8776,7 @@
           <a:lstStyle/>
           <a:p>
             <a:pPr algn="ctr"/>
+            <a:endParaRPr/>
           </a:p>
         </p:txBody>
       </p:sp>
@@ -9178,6 +9012,7 @@
           <a:lstStyle/>
           <a:p>
             <a:pPr algn="ctr"/>
+            <a:endParaRPr/>
           </a:p>
         </p:txBody>
       </p:sp>
@@ -9222,6 +9057,7 @@
           <a:lstStyle/>
           <a:p>
             <a:pPr algn="ctr"/>
+            <a:endParaRPr/>
           </a:p>
         </p:txBody>
       </p:sp>
@@ -9268,6 +9104,7 @@
           <a:lstStyle/>
           <a:p>
             <a:pPr algn="ctr"/>
+            <a:endParaRPr/>
           </a:p>
         </p:txBody>
       </p:sp>
@@ -9503,6 +9340,7 @@
           <a:lstStyle/>
           <a:p>
             <a:pPr algn="ctr"/>
+            <a:endParaRPr/>
           </a:p>
         </p:txBody>
       </p:sp>
@@ -9547,6 +9385,7 @@
           <a:lstStyle/>
           <a:p>
             <a:pPr algn="ctr"/>
+            <a:endParaRPr/>
           </a:p>
         </p:txBody>
       </p:sp>
@@ -9593,6 +9432,7 @@
           <a:lstStyle/>
           <a:p>
             <a:pPr algn="ctr"/>
+            <a:endParaRPr/>
           </a:p>
         </p:txBody>
       </p:sp>
@@ -9739,7 +9579,7 @@
 </file>
 
 <file path=ppt/slides/slide13.xml><?xml version="1.0" encoding="utf-8"?>
-<p:sld xmlns:a="http://schemas.openxmlformats.org/drawingml/2006/main" xmlns:p="http://schemas.openxmlformats.org/presentationml/2006/main" xmlns:r="http://schemas.openxmlformats.org/officeDocument/2006/relationships">
+<p:sld xmlns:a="http://schemas.openxmlformats.org/drawingml/2006/main" xmlns:r="http://schemas.openxmlformats.org/officeDocument/2006/relationships" xmlns:p="http://schemas.openxmlformats.org/presentationml/2006/main">
   <p:cSld>
     <p:bg>
       <p:bgPr>
@@ -9755,7 +9595,14 @@
         <p:cNvGrpSpPr/>
         <p:nvPr/>
       </p:nvGrpSpPr>
-      <p:grpSpPr/>
+      <p:grpSpPr>
+        <a:xfrm>
+          <a:off x="0" y="0"/>
+          <a:ext cx="0" cy="0"/>
+          <a:chOff x="0" y="0"/>
+          <a:chExt cx="0" cy="0"/>
+        </a:xfrm>
+      </p:grpSpPr>
       <p:sp>
         <p:nvSpPr>
           <p:cNvPr id="2" name="tag:L1:tag"/>
@@ -10056,7 +9903,7 @@
         <p:spPr>
           <a:xfrm>
             <a:off x="502920" y="1554480"/>
-            <a:ext cx="7818120" cy="3738077"/>
+            <a:ext cx="7818120" cy="3898646"/>
           </a:xfrm>
           <a:prstGeom prst="rect">
             <a:avLst/>
@@ -10090,6 +9937,7 @@
           <a:lstStyle/>
           <a:p>
             <a:pPr algn="ctr"/>
+            <a:endParaRPr/>
           </a:p>
         </p:txBody>
       </p:sp>
@@ -10147,15 +9995,15 @@
           <p:nvPr/>
         </p:nvPicPr>
         <p:blipFill>
-          <a:blip r:embed="rId2"/>
+          <a:blip r:embed="rId3"/>
           <a:stretch>
             <a:fillRect/>
           </a:stretch>
         </p:blipFill>
         <p:spPr>
           <a:xfrm>
-            <a:off x="630936" y="1896110"/>
-            <a:ext cx="7562088" cy="3268431"/>
+            <a:off x="859591" y="1896110"/>
+            <a:ext cx="7104776" cy="3429000"/>
           </a:xfrm>
           <a:prstGeom prst="rect">
             <a:avLst/>
@@ -10171,7 +10019,7 @@
         <p:spPr>
           <a:xfrm>
             <a:off x="8503920" y="1554480"/>
-            <a:ext cx="3184855" cy="1172873"/>
+            <a:ext cx="3184855" cy="1226396"/>
           </a:xfrm>
           <a:prstGeom prst="rect">
             <a:avLst/>
@@ -10205,6 +10053,7 @@
           <a:lstStyle/>
           <a:p>
             <a:pPr algn="ctr"/>
+            <a:endParaRPr/>
           </a:p>
         </p:txBody>
       </p:sp>
@@ -10362,8 +10211,8 @@
         </p:nvSpPr>
         <p:spPr>
           <a:xfrm>
-            <a:off x="8503920" y="2837081"/>
-            <a:ext cx="3184855" cy="1172873"/>
+            <a:off x="8503920" y="2890604"/>
+            <a:ext cx="3184855" cy="1226396"/>
           </a:xfrm>
           <a:prstGeom prst="rect">
             <a:avLst/>
@@ -10397,6 +10246,7 @@
           <a:lstStyle/>
           <a:p>
             <a:pPr algn="ctr"/>
+            <a:endParaRPr/>
           </a:p>
         </p:txBody>
       </p:sp>
@@ -10408,7 +10258,7 @@
         </p:nvSpPr>
         <p:spPr>
           <a:xfrm>
-            <a:off x="8686800" y="3019961"/>
+            <a:off x="8686800" y="3073484"/>
             <a:ext cx="2819095" cy="158750"/>
           </a:xfrm>
           <a:prstGeom prst="rect">
@@ -10453,7 +10303,7 @@
         </p:nvSpPr>
         <p:spPr>
           <a:xfrm>
-            <a:off x="8686800" y="3233575"/>
+            <a:off x="8686800" y="3287098"/>
             <a:ext cx="2819095" cy="341630"/>
           </a:xfrm>
           <a:prstGeom prst="rect">
@@ -10509,7 +10359,7 @@
         </p:nvSpPr>
         <p:spPr>
           <a:xfrm>
-            <a:off x="8686800" y="3630069"/>
+            <a:off x="8686800" y="3683592"/>
             <a:ext cx="2819095" cy="195580"/>
           </a:xfrm>
           <a:prstGeom prst="rect">
@@ -10554,8 +10404,8 @@
         </p:nvSpPr>
         <p:spPr>
           <a:xfrm>
-            <a:off x="8503920" y="4119683"/>
-            <a:ext cx="3184855" cy="1172873"/>
+            <a:off x="8503920" y="4226729"/>
+            <a:ext cx="3184855" cy="1226396"/>
           </a:xfrm>
           <a:prstGeom prst="rect">
             <a:avLst/>
@@ -10589,6 +10439,7 @@
           <a:lstStyle/>
           <a:p>
             <a:pPr algn="ctr"/>
+            <a:endParaRPr/>
           </a:p>
         </p:txBody>
       </p:sp>
@@ -10600,7 +10451,7 @@
         </p:nvSpPr>
         <p:spPr>
           <a:xfrm>
-            <a:off x="8686800" y="4302563"/>
+            <a:off x="8686800" y="4409609"/>
             <a:ext cx="2819095" cy="158750"/>
           </a:xfrm>
           <a:prstGeom prst="rect">
@@ -10645,7 +10496,7 @@
         </p:nvSpPr>
         <p:spPr>
           <a:xfrm>
-            <a:off x="8686800" y="4516177"/>
+            <a:off x="8686800" y="4623223"/>
             <a:ext cx="2819095" cy="341630"/>
           </a:xfrm>
           <a:prstGeom prst="rect">
@@ -10701,7 +10552,7 @@
         </p:nvSpPr>
         <p:spPr>
           <a:xfrm>
-            <a:off x="8686800" y="4912671"/>
+            <a:off x="8686800" y="5019717"/>
             <a:ext cx="2819095" cy="195580"/>
           </a:xfrm>
           <a:prstGeom prst="rect">
@@ -10746,7 +10597,7 @@
         </p:nvSpPr>
         <p:spPr>
           <a:xfrm>
-            <a:off x="502920" y="5429717"/>
+            <a:off x="502920" y="5590286"/>
             <a:ext cx="11185855" cy="596900"/>
           </a:xfrm>
           <a:prstGeom prst="rect">
@@ -10781,6 +10632,7 @@
           <a:lstStyle/>
           <a:p>
             <a:pPr algn="ctr"/>
+            <a:endParaRPr/>
           </a:p>
         </p:txBody>
       </p:sp>
@@ -10792,7 +10644,7 @@
         </p:nvSpPr>
         <p:spPr>
           <a:xfrm>
-            <a:off x="685800" y="5612597"/>
+            <a:off x="685800" y="5773166"/>
             <a:ext cx="10820095" cy="231140"/>
           </a:xfrm>
           <a:prstGeom prst="rect">
@@ -10849,7 +10701,7 @@
 </file>
 
 <file path=ppt/slides/slide14.xml><?xml version="1.0" encoding="utf-8"?>
-<p:sld xmlns:a="http://schemas.openxmlformats.org/drawingml/2006/main" xmlns:p="http://schemas.openxmlformats.org/presentationml/2006/main" xmlns:r="http://schemas.openxmlformats.org/officeDocument/2006/relationships">
+<p:sld xmlns:a="http://schemas.openxmlformats.org/drawingml/2006/main" xmlns:r="http://schemas.openxmlformats.org/officeDocument/2006/relationships" xmlns:p="http://schemas.openxmlformats.org/presentationml/2006/main">
   <p:cSld>
     <p:bg>
       <p:bgPr>
@@ -10865,7 +10717,14 @@
         <p:cNvGrpSpPr/>
         <p:nvPr/>
       </p:nvGrpSpPr>
-      <p:grpSpPr/>
+      <p:grpSpPr>
+        <a:xfrm>
+          <a:off x="0" y="0"/>
+          <a:ext cx="0" cy="0"/>
+          <a:chOff x="0" y="0"/>
+          <a:chExt cx="0" cy="0"/>
+        </a:xfrm>
+      </p:grpSpPr>
       <p:sp>
         <p:nvSpPr>
           <p:cNvPr id="2" name="tag:L1:tag"/>
@@ -11200,6 +11059,7 @@
           <a:lstStyle/>
           <a:p>
             <a:pPr algn="ctr"/>
+            <a:endParaRPr/>
           </a:p>
         </p:txBody>
       </p:sp>
@@ -11257,7 +11117,7 @@
           <p:nvPr/>
         </p:nvPicPr>
         <p:blipFill>
-          <a:blip r:embed="rId2"/>
+          <a:blip r:embed="rId3"/>
           <a:stretch>
             <a:fillRect/>
           </a:stretch>
@@ -11315,6 +11175,7 @@
           <a:lstStyle/>
           <a:p>
             <a:pPr algn="ctr"/>
+            <a:endParaRPr/>
           </a:p>
         </p:txBody>
       </p:sp>
@@ -11507,6 +11368,7 @@
           <a:lstStyle/>
           <a:p>
             <a:pPr algn="ctr"/>
+            <a:endParaRPr/>
           </a:p>
         </p:txBody>
       </p:sp>
@@ -11699,6 +11561,7 @@
           <a:lstStyle/>
           <a:p>
             <a:pPr algn="ctr"/>
+            <a:endParaRPr/>
           </a:p>
         </p:txBody>
       </p:sp>
@@ -11891,6 +11754,7 @@
           <a:lstStyle/>
           <a:p>
             <a:pPr algn="ctr"/>
+            <a:endParaRPr/>
           </a:p>
         </p:txBody>
       </p:sp>
@@ -11992,7 +11856,7 @@
 </file>
 
 <file path=ppt/slides/slide15.xml><?xml version="1.0" encoding="utf-8"?>
-<p:sld xmlns:a="http://schemas.openxmlformats.org/drawingml/2006/main" xmlns:p="http://schemas.openxmlformats.org/presentationml/2006/main" xmlns:r="http://schemas.openxmlformats.org/officeDocument/2006/relationships">
+<p:sld xmlns:a="http://schemas.openxmlformats.org/drawingml/2006/main" xmlns:r="http://schemas.openxmlformats.org/officeDocument/2006/relationships" xmlns:p="http://schemas.openxmlformats.org/presentationml/2006/main">
   <p:cSld>
     <p:bg>
       <p:bgPr>
@@ -12008,7 +11872,14 @@
         <p:cNvGrpSpPr/>
         <p:nvPr/>
       </p:nvGrpSpPr>
-      <p:grpSpPr/>
+      <p:grpSpPr>
+        <a:xfrm>
+          <a:off x="0" y="0"/>
+          <a:ext cx="0" cy="0"/>
+          <a:chOff x="0" y="0"/>
+          <a:chExt cx="0" cy="0"/>
+        </a:xfrm>
+      </p:grpSpPr>
       <p:sp>
         <p:nvSpPr>
           <p:cNvPr id="2" name="tag:L1:tag"/>
@@ -12343,6 +12214,7 @@
           <a:lstStyle/>
           <a:p>
             <a:pPr algn="ctr"/>
+            <a:endParaRPr/>
           </a:p>
         </p:txBody>
       </p:sp>
@@ -12400,7 +12272,7 @@
           <p:nvPr/>
         </p:nvPicPr>
         <p:blipFill>
-          <a:blip r:embed="rId2"/>
+          <a:blip r:embed="rId3"/>
           <a:stretch>
             <a:fillRect/>
           </a:stretch>
@@ -12458,6 +12330,7 @@
           <a:lstStyle/>
           <a:p>
             <a:pPr algn="ctr"/>
+            <a:endParaRPr/>
           </a:p>
         </p:txBody>
       </p:sp>
@@ -12650,6 +12523,7 @@
           <a:lstStyle/>
           <a:p>
             <a:pPr algn="ctr"/>
+            <a:endParaRPr/>
           </a:p>
         </p:txBody>
       </p:sp>
@@ -12842,6 +12716,7 @@
           <a:lstStyle/>
           <a:p>
             <a:pPr algn="ctr"/>
+            <a:endParaRPr/>
           </a:p>
         </p:txBody>
       </p:sp>
@@ -13034,6 +12909,7 @@
           <a:lstStyle/>
           <a:p>
             <a:pPr algn="ctr"/>
+            <a:endParaRPr/>
           </a:p>
         </p:txBody>
       </p:sp>
@@ -13135,7 +13011,7 @@
 </file>
 
 <file path=ppt/slides/slide16.xml><?xml version="1.0" encoding="utf-8"?>
-<p:sld xmlns:a="http://schemas.openxmlformats.org/drawingml/2006/main" xmlns:p="http://schemas.openxmlformats.org/presentationml/2006/main" xmlns:r="http://schemas.openxmlformats.org/officeDocument/2006/relationships">
+<p:sld xmlns:a="http://schemas.openxmlformats.org/drawingml/2006/main" xmlns:r="http://schemas.openxmlformats.org/officeDocument/2006/relationships" xmlns:p="http://schemas.openxmlformats.org/presentationml/2006/main">
   <p:cSld>
     <p:bg>
       <p:bgPr>
@@ -13151,7 +13027,14 @@
         <p:cNvGrpSpPr/>
         <p:nvPr/>
       </p:nvGrpSpPr>
-      <p:grpSpPr/>
+      <p:grpSpPr>
+        <a:xfrm>
+          <a:off x="0" y="0"/>
+          <a:ext cx="0" cy="0"/>
+          <a:chOff x="0" y="0"/>
+          <a:chExt cx="0" cy="0"/>
+        </a:xfrm>
+      </p:grpSpPr>
       <p:sp>
         <p:nvSpPr>
           <p:cNvPr id="2" name="tag:L1:tag"/>
@@ -13486,6 +13369,7 @@
           <a:lstStyle/>
           <a:p>
             <a:pPr algn="ctr"/>
+            <a:endParaRPr/>
           </a:p>
         </p:txBody>
       </p:sp>
@@ -13588,7 +13472,7 @@
           <p:nvPr/>
         </p:nvPicPr>
         <p:blipFill>
-          <a:blip r:embed="rId2"/>
+          <a:blip r:embed="rId3"/>
           <a:stretch>
             <a:fillRect/>
           </a:stretch>
@@ -13757,6 +13641,7 @@
           <a:lstStyle/>
           <a:p>
             <a:pPr algn="ctr"/>
+            <a:endParaRPr/>
           </a:p>
         </p:txBody>
       </p:sp>
@@ -13893,6 +13778,7 @@
           <a:lstStyle/>
           <a:p>
             <a:pPr algn="ctr"/>
+            <a:endParaRPr/>
           </a:p>
         </p:txBody>
       </p:sp>
@@ -14050,6 +13936,7 @@
           <a:lstStyle/>
           <a:p>
             <a:pPr algn="ctr"/>
+            <a:endParaRPr/>
           </a:p>
         </p:txBody>
       </p:sp>
@@ -14242,6 +14129,7 @@
           <a:lstStyle/>
           <a:p>
             <a:pPr algn="ctr"/>
+            <a:endParaRPr/>
           </a:p>
         </p:txBody>
       </p:sp>
@@ -14479,7 +14367,7 @@
           </a:bodyPr>
           <a:lstStyle/>
           <a:p>
-            <a:pPr algn="l" marL="164592" indent="-164592">
+            <a:pPr marL="164592" indent="-164592" algn="l">
               <a:lnSpc>
                 <a:spcPts val="1610"/>
               </a:lnSpc>
@@ -14505,7 +14393,7 @@
             </a:r>
           </a:p>
           <a:p>
-            <a:pPr algn="l" marL="164592" indent="-164592">
+            <a:pPr marL="164592" indent="-164592" algn="l">
               <a:lnSpc>
                 <a:spcPts val="1610"/>
               </a:lnSpc>
@@ -14575,6 +14463,7 @@
           <a:lstStyle/>
           <a:p>
             <a:pPr algn="ctr"/>
+            <a:endParaRPr/>
           </a:p>
         </p:txBody>
       </p:sp>
@@ -14674,18 +14563,7 @@
                 <a:ea typeface="맑은 고딕"/>
                 <a:cs typeface="맑은 고딕"/>
               </a:rPr>
-              <a:t>해상도를 높여 </a:t>
-            </a:r>
-            <a:r>
-              <a:rPr lang="ko-KR" sz="1500" b="1" dirty="0">
-                <a:solidFill>
-                  <a:srgbClr val="2563EB"/>
-                </a:solidFill>
-                <a:latin typeface="맑은 고딕"/>
-                <a:ea typeface="맑은 고딕"/>
-                <a:cs typeface="맑은 고딕"/>
-              </a:rPr>
-              <a:t>실사 대기 적체(WIP) 부담</a:t>
+              <a:t>해상도를 높여 실사 대기 적체(WIP) 부담</a:t>
             </a:r>
             <a:r>
               <a:rPr lang="ko-KR" sz="1500" b="0" dirty="0">
@@ -14710,7 +14588,7 @@
 </file>
 
 <file path=ppt/slides/slide17.xml><?xml version="1.0" encoding="utf-8"?>
-<p:sld xmlns:a="http://schemas.openxmlformats.org/drawingml/2006/main" xmlns:p="http://schemas.openxmlformats.org/presentationml/2006/main" xmlns:r="http://schemas.openxmlformats.org/officeDocument/2006/relationships">
+<p:sld xmlns:a="http://schemas.openxmlformats.org/drawingml/2006/main" xmlns:r="http://schemas.openxmlformats.org/officeDocument/2006/relationships" xmlns:p="http://schemas.openxmlformats.org/presentationml/2006/main">
   <p:cSld>
     <p:bg>
       <p:bgPr>
@@ -14726,7 +14604,14 @@
         <p:cNvGrpSpPr/>
         <p:nvPr/>
       </p:nvGrpSpPr>
-      <p:grpSpPr/>
+      <p:grpSpPr>
+        <a:xfrm>
+          <a:off x="0" y="0"/>
+          <a:ext cx="0" cy="0"/>
+          <a:chOff x="0" y="0"/>
+          <a:chExt cx="0" cy="0"/>
+        </a:xfrm>
+      </p:grpSpPr>
       <p:sp>
         <p:nvSpPr>
           <p:cNvPr id="2" name="tag:L1:tag"/>
@@ -15061,6 +14946,7 @@
           <a:lstStyle/>
           <a:p>
             <a:pPr algn="ctr"/>
+            <a:endParaRPr/>
           </a:p>
         </p:txBody>
       </p:sp>
@@ -16201,6 +16087,7 @@
           <a:lstStyle/>
           <a:p>
             <a:pPr algn="ctr"/>
+            <a:endParaRPr/>
           </a:p>
         </p:txBody>
       </p:sp>
@@ -16414,6 +16301,7 @@
           <a:lstStyle/>
           <a:p>
             <a:pPr algn="ctr"/>
+            <a:endParaRPr/>
           </a:p>
         </p:txBody>
       </p:sp>
@@ -16484,7 +16372,7 @@
           </a:bodyPr>
           <a:lstStyle/>
           <a:p>
-            <a:pPr algn="l" marL="164592" indent="-164592">
+            <a:pPr marL="164592" indent="-164592" algn="l">
               <a:lnSpc>
                 <a:spcPts val="1610"/>
               </a:lnSpc>
@@ -16564,7 +16452,7 @@
             </a:r>
           </a:p>
           <a:p>
-            <a:pPr algn="l" marL="164592" indent="-164592">
+            <a:pPr marL="164592" indent="-164592" algn="l">
               <a:lnSpc>
                 <a:spcPts val="1610"/>
               </a:lnSpc>
@@ -16622,7 +16510,7 @@
             </a:r>
           </a:p>
           <a:p>
-            <a:pPr algn="l" marL="164592" indent="-164592">
+            <a:pPr marL="164592" indent="-164592" algn="l">
               <a:lnSpc>
                 <a:spcPts val="1610"/>
               </a:lnSpc>
@@ -16703,6 +16591,7 @@
           <a:lstStyle/>
           <a:p>
             <a:pPr algn="ctr"/>
+            <a:endParaRPr/>
           </a:p>
         </p:txBody>
       </p:sp>
@@ -17049,7 +16938,7 @@
 </file>
 
 <file path=ppt/slides/slide18.xml><?xml version="1.0" encoding="utf-8"?>
-<p:sld xmlns:a="http://schemas.openxmlformats.org/drawingml/2006/main" xmlns:p="http://schemas.openxmlformats.org/presentationml/2006/main" xmlns:r="http://schemas.openxmlformats.org/officeDocument/2006/relationships">
+<p:sld xmlns:a="http://schemas.openxmlformats.org/drawingml/2006/main" xmlns:r="http://schemas.openxmlformats.org/officeDocument/2006/relationships" xmlns:p="http://schemas.openxmlformats.org/presentationml/2006/main">
   <p:cSld>
     <p:bg>
       <p:bgPr>
@@ -17065,7 +16954,14 @@
         <p:cNvGrpSpPr/>
         <p:nvPr/>
       </p:nvGrpSpPr>
-      <p:grpSpPr/>
+      <p:grpSpPr>
+        <a:xfrm>
+          <a:off x="0" y="0"/>
+          <a:ext cx="0" cy="0"/>
+          <a:chOff x="0" y="0"/>
+          <a:chExt cx="0" cy="0"/>
+        </a:xfrm>
+      </p:grpSpPr>
       <p:sp>
         <p:nvSpPr>
           <p:cNvPr id="2" name="tag:L1:tag"/>
@@ -17422,6 +17318,7 @@
           <a:lstStyle/>
           <a:p>
             <a:pPr algn="ctr"/>
+            <a:endParaRPr/>
           </a:p>
         </p:txBody>
       </p:sp>
@@ -17556,6 +17453,7 @@
           <a:lstStyle/>
           <a:p>
             <a:pPr algn="ctr"/>
+            <a:endParaRPr/>
           </a:p>
         </p:txBody>
       </p:sp>
@@ -17690,6 +17588,7 @@
           <a:lstStyle/>
           <a:p>
             <a:pPr algn="ctr"/>
+            <a:endParaRPr/>
           </a:p>
         </p:txBody>
       </p:sp>
@@ -18202,6 +18101,7 @@
           <a:lstStyle/>
           <a:p>
             <a:pPr algn="ctr"/>
+            <a:endParaRPr/>
           </a:p>
         </p:txBody>
       </p:sp>
@@ -18539,6 +18439,7 @@
           <a:lstStyle/>
           <a:p>
             <a:pPr algn="ctr"/>
+            <a:endParaRPr/>
           </a:p>
         </p:txBody>
       </p:sp>
@@ -18950,7 +18851,7 @@
 </file>
 
 <file path=ppt/slides/slide19.xml><?xml version="1.0" encoding="utf-8"?>
-<p:sld xmlns:a="http://schemas.openxmlformats.org/drawingml/2006/main" xmlns:p="http://schemas.openxmlformats.org/presentationml/2006/main" xmlns:r="http://schemas.openxmlformats.org/officeDocument/2006/relationships">
+<p:sld xmlns:a="http://schemas.openxmlformats.org/drawingml/2006/main" xmlns:r="http://schemas.openxmlformats.org/officeDocument/2006/relationships" xmlns:p="http://schemas.openxmlformats.org/presentationml/2006/main">
   <p:cSld>
     <p:bg>
       <p:bgPr>
@@ -18966,7 +18867,14 @@
         <p:cNvGrpSpPr/>
         <p:nvPr/>
       </p:nvGrpSpPr>
-      <p:grpSpPr/>
+      <p:grpSpPr>
+        <a:xfrm>
+          <a:off x="0" y="0"/>
+          <a:ext cx="0" cy="0"/>
+          <a:chOff x="0" y="0"/>
+          <a:chExt cx="0" cy="0"/>
+        </a:xfrm>
+      </p:grpSpPr>
       <p:sp>
         <p:nvSpPr>
           <p:cNvPr id="2" name="tag:L1:tag"/>
@@ -19256,6 +19164,7 @@
           <a:lstStyle/>
           <a:p>
             <a:pPr algn="ctr"/>
+            <a:endParaRPr/>
           </a:p>
         </p:txBody>
       </p:sp>
@@ -19437,6 +19346,7 @@
           <a:lstStyle/>
           <a:p>
             <a:pPr algn="ctr"/>
+            <a:endParaRPr/>
           </a:p>
         </p:txBody>
       </p:sp>
@@ -19618,6 +19528,7 @@
           <a:lstStyle/>
           <a:p>
             <a:pPr algn="ctr"/>
+            <a:endParaRPr/>
           </a:p>
         </p:txBody>
       </p:sp>
@@ -19799,6 +19710,7 @@
           <a:lstStyle/>
           <a:p>
             <a:pPr algn="ctr"/>
+            <a:endParaRPr/>
           </a:p>
         </p:txBody>
       </p:sp>
@@ -20079,7 +19991,7 @@
 </file>
 
 <file path=ppt/slides/slide2.xml><?xml version="1.0" encoding="utf-8"?>
-<p:sld xmlns:a="http://schemas.openxmlformats.org/drawingml/2006/main" xmlns:p="http://schemas.openxmlformats.org/presentationml/2006/main" xmlns:r="http://schemas.openxmlformats.org/officeDocument/2006/relationships">
+<p:sld xmlns:a="http://schemas.openxmlformats.org/drawingml/2006/main" xmlns:r="http://schemas.openxmlformats.org/officeDocument/2006/relationships" xmlns:p="http://schemas.openxmlformats.org/presentationml/2006/main">
   <p:cSld>
     <p:bg>
       <p:bgPr>
@@ -20095,7 +20007,14 @@
         <p:cNvGrpSpPr/>
         <p:nvPr/>
       </p:nvGrpSpPr>
-      <p:grpSpPr/>
+      <p:grpSpPr>
+        <a:xfrm>
+          <a:off x="0" y="0"/>
+          <a:ext cx="0" cy="0"/>
+          <a:chOff x="0" y="0"/>
+          <a:chExt cx="0" cy="0"/>
+        </a:xfrm>
+      </p:grpSpPr>
       <p:sp>
         <p:nvSpPr>
           <p:cNvPr id="2" name="tag:L1:tag"/>
@@ -20345,7 +20264,7 @@
       <p:sp>
         <p:nvSpPr>
           <p:cNvPr id="8" name="tile-01">
-            <a:hlinkClick action="ppaction://hlinksldjump" r:id="rId3"/>
+            <a:hlinkClick r:id="rId3" action="ppaction://hlinksldjump"/>
           </p:cNvPr>
           <p:cNvSpPr/>
           <p:nvPr/>
@@ -20387,6 +20306,7 @@
           <a:lstStyle/>
           <a:p>
             <a:pPr algn="ctr"/>
+            <a:endParaRPr/>
           </a:p>
         </p:txBody>
       </p:sp>
@@ -20476,6 +20396,7 @@
           <a:lstStyle/>
           <a:p>
             <a:pPr algn="ctr"/>
+            <a:endParaRPr/>
           </a:p>
         </p:txBody>
       </p:sp>
@@ -20591,7 +20512,7 @@
           </a:bodyPr>
           <a:lstStyle/>
           <a:p>
-            <a:pPr algn="l" marL="164592" indent="-164592">
+            <a:pPr marL="164592" indent="-164592" algn="l">
               <a:lnSpc>
                 <a:spcPts val="1610"/>
               </a:lnSpc>
@@ -20638,7 +20559,7 @@
             </a:r>
           </a:p>
           <a:p>
-            <a:pPr algn="l" marL="164592" indent="-164592">
+            <a:pPr marL="164592" indent="-164592" algn="l">
               <a:lnSpc>
                 <a:spcPts val="1610"/>
               </a:lnSpc>
@@ -20664,7 +20585,7 @@
             </a:r>
           </a:p>
           <a:p>
-            <a:pPr algn="l" marL="164592" indent="-164592">
+            <a:pPr marL="164592" indent="-164592" algn="l">
               <a:lnSpc>
                 <a:spcPts val="1610"/>
               </a:lnSpc>
@@ -20782,7 +20703,7 @@
       <p:sp>
         <p:nvSpPr>
           <p:cNvPr id="15" name="tile-02">
-            <a:hlinkClick action="ppaction://hlinksldjump" r:id="rId4"/>
+            <a:hlinkClick r:id="rId4" action="ppaction://hlinksldjump"/>
           </p:cNvPr>
           <p:cNvSpPr/>
           <p:nvPr/>
@@ -20824,6 +20745,7 @@
           <a:lstStyle/>
           <a:p>
             <a:pPr algn="ctr"/>
+            <a:endParaRPr/>
           </a:p>
         </p:txBody>
       </p:sp>
@@ -20913,6 +20835,7 @@
           <a:lstStyle/>
           <a:p>
             <a:pPr algn="ctr"/>
+            <a:endParaRPr/>
           </a:p>
         </p:txBody>
       </p:sp>
@@ -21028,7 +20951,7 @@
           </a:bodyPr>
           <a:lstStyle/>
           <a:p>
-            <a:pPr algn="l" marL="164592" indent="-164592">
+            <a:pPr marL="164592" indent="-164592" algn="l">
               <a:lnSpc>
                 <a:spcPts val="1610"/>
               </a:lnSpc>
@@ -21054,7 +20977,7 @@
             </a:r>
           </a:p>
           <a:p>
-            <a:pPr algn="l" marL="164592" indent="-164592">
+            <a:pPr marL="164592" indent="-164592" algn="l">
               <a:lnSpc>
                 <a:spcPts val="1610"/>
               </a:lnSpc>
@@ -21080,7 +21003,7 @@
             </a:r>
           </a:p>
           <a:p>
-            <a:pPr algn="l" marL="164592" indent="-164592">
+            <a:pPr marL="164592" indent="-164592" algn="l">
               <a:lnSpc>
                 <a:spcPts val="1610"/>
               </a:lnSpc>
@@ -21106,7 +21029,7 @@
             </a:r>
           </a:p>
           <a:p>
-            <a:pPr algn="l" marL="164592" indent="-164592">
+            <a:pPr marL="164592" indent="-164592" algn="l">
               <a:lnSpc>
                 <a:spcPts val="1610"/>
               </a:lnSpc>
@@ -21224,7 +21147,7 @@
       <p:sp>
         <p:nvSpPr>
           <p:cNvPr id="22" name="tile-03">
-            <a:hlinkClick action="ppaction://hlinksldjump" r:id="rId5"/>
+            <a:hlinkClick r:id="rId5" action="ppaction://hlinksldjump"/>
           </p:cNvPr>
           <p:cNvSpPr/>
           <p:nvPr/>
@@ -21266,6 +21189,7 @@
           <a:lstStyle/>
           <a:p>
             <a:pPr algn="ctr"/>
+            <a:endParaRPr/>
           </a:p>
         </p:txBody>
       </p:sp>
@@ -21355,6 +21279,7 @@
           <a:lstStyle/>
           <a:p>
             <a:pPr algn="ctr"/>
+            <a:endParaRPr/>
           </a:p>
         </p:txBody>
       </p:sp>
@@ -21470,7 +21395,7 @@
           </a:bodyPr>
           <a:lstStyle/>
           <a:p>
-            <a:pPr algn="l" marL="164592" indent="-164592">
+            <a:pPr marL="164592" indent="-164592" algn="l">
               <a:lnSpc>
                 <a:spcPts val="1610"/>
               </a:lnSpc>
@@ -21538,7 +21463,7 @@
             </a:r>
           </a:p>
           <a:p>
-            <a:pPr algn="l" marL="164592" indent="-164592">
+            <a:pPr marL="164592" indent="-164592" algn="l">
               <a:lnSpc>
                 <a:spcPts val="1610"/>
               </a:lnSpc>
@@ -21585,7 +21510,7 @@
             </a:r>
           </a:p>
           <a:p>
-            <a:pPr algn="l" marL="164592" indent="-164592">
+            <a:pPr marL="164592" indent="-164592" algn="l">
               <a:lnSpc>
                 <a:spcPts val="1610"/>
               </a:lnSpc>
@@ -21682,7 +21607,7 @@
       <p:sp>
         <p:nvSpPr>
           <p:cNvPr id="29" name="tile-04">
-            <a:hlinkClick action="ppaction://hlinksldjump" r:id="rId6"/>
+            <a:hlinkClick r:id="rId6" action="ppaction://hlinksldjump"/>
           </p:cNvPr>
           <p:cNvSpPr/>
           <p:nvPr/>
@@ -21724,6 +21649,7 @@
           <a:lstStyle/>
           <a:p>
             <a:pPr algn="ctr"/>
+            <a:endParaRPr/>
           </a:p>
         </p:txBody>
       </p:sp>
@@ -21813,6 +21739,7 @@
           <a:lstStyle/>
           <a:p>
             <a:pPr algn="ctr"/>
+            <a:endParaRPr/>
           </a:p>
         </p:txBody>
       </p:sp>
@@ -21928,7 +21855,7 @@
           </a:bodyPr>
           <a:lstStyle/>
           <a:p>
-            <a:pPr algn="l" marL="164592" indent="-164592">
+            <a:pPr marL="164592" indent="-164592" algn="l">
               <a:lnSpc>
                 <a:spcPts val="1610"/>
               </a:lnSpc>
@@ -22009,7 +21936,7 @@
 </file>
 
 <file path=ppt/slides/slide3.xml><?xml version="1.0" encoding="utf-8"?>
-<p:sld xmlns:a="http://schemas.openxmlformats.org/drawingml/2006/main" xmlns:p="http://schemas.openxmlformats.org/presentationml/2006/main" xmlns:r="http://schemas.openxmlformats.org/officeDocument/2006/relationships">
+<p:sld xmlns:a="http://schemas.openxmlformats.org/drawingml/2006/main" xmlns:r="http://schemas.openxmlformats.org/officeDocument/2006/relationships" xmlns:p="http://schemas.openxmlformats.org/presentationml/2006/main">
   <p:cSld>
     <p:bg>
       <p:bgPr>
@@ -22025,7 +21952,14 @@
         <p:cNvGrpSpPr/>
         <p:nvPr/>
       </p:nvGrpSpPr>
-      <p:grpSpPr/>
+      <p:grpSpPr>
+        <a:xfrm>
+          <a:off x="0" y="0"/>
+          <a:ext cx="0" cy="0"/>
+          <a:chOff x="0" y="0"/>
+          <a:chExt cx="0" cy="0"/>
+        </a:xfrm>
+      </p:grpSpPr>
       <p:sp>
         <p:nvSpPr>
           <p:cNvPr id="2" name="tag:L1:tag"/>
@@ -22315,6 +22249,7 @@
           <a:lstStyle/>
           <a:p>
             <a:pPr algn="ctr"/>
+            <a:endParaRPr/>
           </a:p>
         </p:txBody>
       </p:sp>
@@ -22495,6 +22430,7 @@
           <a:lstStyle/>
           <a:p>
             <a:pPr algn="ctr"/>
+            <a:endParaRPr/>
           </a:p>
         </p:txBody>
       </p:sp>
@@ -22666,7 +22602,7 @@
           </a:bodyPr>
           <a:lstStyle/>
           <a:p>
-            <a:pPr algn="l" marL="164592" indent="-164592">
+            <a:pPr marL="164592" indent="-164592" algn="l">
               <a:lnSpc>
                 <a:spcPts val="1680"/>
               </a:lnSpc>
@@ -22692,7 +22628,7 @@
             </a:r>
           </a:p>
           <a:p>
-            <a:pPr algn="l" marL="164592" indent="-164592">
+            <a:pPr marL="164592" indent="-164592" algn="l">
               <a:lnSpc>
                 <a:spcPts val="1680"/>
               </a:lnSpc>
@@ -22739,7 +22675,7 @@
             </a:r>
           </a:p>
           <a:p>
-            <a:pPr algn="l" marL="164592" indent="-164592">
+            <a:pPr marL="164592" indent="-164592" algn="l">
               <a:lnSpc>
                 <a:spcPts val="1680"/>
               </a:lnSpc>
@@ -22875,6 +22811,7 @@
           <a:lstStyle/>
           <a:p>
             <a:pPr algn="ctr"/>
+            <a:endParaRPr/>
           </a:p>
         </p:txBody>
       </p:sp>
@@ -23046,7 +22983,7 @@
           </a:bodyPr>
           <a:lstStyle/>
           <a:p>
-            <a:pPr algn="l" marL="164592" indent="-164592">
+            <a:pPr marL="164592" indent="-164592" algn="l">
               <a:lnSpc>
                 <a:spcPts val="1680"/>
               </a:lnSpc>
@@ -23093,7 +23030,7 @@
             </a:r>
           </a:p>
           <a:p>
-            <a:pPr algn="l" marL="164592" indent="-164592">
+            <a:pPr marL="164592" indent="-164592" algn="l">
               <a:lnSpc>
                 <a:spcPts val="1680"/>
               </a:lnSpc>
@@ -23119,7 +23056,7 @@
             </a:r>
           </a:p>
           <a:p>
-            <a:pPr algn="l" marL="164592" indent="-164592">
+            <a:pPr marL="164592" indent="-164592" algn="l">
               <a:lnSpc>
                 <a:spcPts val="1680"/>
               </a:lnSpc>
@@ -23255,6 +23192,7 @@
           <a:lstStyle/>
           <a:p>
             <a:pPr algn="ctr"/>
+            <a:endParaRPr/>
           </a:p>
         </p:txBody>
       </p:sp>
@@ -23437,7 +23375,7 @@
           </a:bodyPr>
           <a:lstStyle/>
           <a:p>
-            <a:pPr algn="l" marL="164592" indent="-164592">
+            <a:pPr marL="164592" indent="-164592" algn="l">
               <a:lnSpc>
                 <a:spcPts val="1680"/>
               </a:lnSpc>
@@ -23484,7 +23422,7 @@
             </a:r>
           </a:p>
           <a:p>
-            <a:pPr algn="l" marL="164592" indent="-164592">
+            <a:pPr marL="164592" indent="-164592" algn="l">
               <a:lnSpc>
                 <a:spcPts val="1680"/>
               </a:lnSpc>
@@ -23510,7 +23448,7 @@
             </a:r>
           </a:p>
           <a:p>
-            <a:pPr algn="l" marL="164592" indent="-164592">
+            <a:pPr marL="164592" indent="-164592" algn="l">
               <a:lnSpc>
                 <a:spcPts val="1680"/>
               </a:lnSpc>
@@ -23612,7 +23550,7 @@
 </file>
 
 <file path=ppt/slides/slide4.xml><?xml version="1.0" encoding="utf-8"?>
-<p:sld xmlns:a="http://schemas.openxmlformats.org/drawingml/2006/main" xmlns:p="http://schemas.openxmlformats.org/presentationml/2006/main" xmlns:r="http://schemas.openxmlformats.org/officeDocument/2006/relationships">
+<p:sld xmlns:a="http://schemas.openxmlformats.org/drawingml/2006/main" xmlns:r="http://schemas.openxmlformats.org/officeDocument/2006/relationships" xmlns:p="http://schemas.openxmlformats.org/presentationml/2006/main">
   <p:cSld>
     <p:bg>
       <p:bgPr>
@@ -23628,7 +23566,14 @@
         <p:cNvGrpSpPr/>
         <p:nvPr/>
       </p:nvGrpSpPr>
-      <p:grpSpPr/>
+      <p:grpSpPr>
+        <a:xfrm>
+          <a:off x="0" y="0"/>
+          <a:ext cx="0" cy="0"/>
+          <a:chOff x="0" y="0"/>
+          <a:chExt cx="0" cy="0"/>
+        </a:xfrm>
+      </p:grpSpPr>
       <p:sp>
         <p:nvSpPr>
           <p:cNvPr id="2" name="tag:L1:tag"/>
@@ -23963,6 +23908,7 @@
           <a:lstStyle/>
           <a:p>
             <a:pPr algn="ctr"/>
+            <a:endParaRPr/>
           </a:p>
         </p:txBody>
       </p:sp>
@@ -24020,7 +23966,7 @@
           <p:nvPr/>
         </p:nvPicPr>
         <p:blipFill>
-          <a:blip r:embed="rId2"/>
+          <a:blip r:embed="rId3"/>
           <a:stretch>
             <a:fillRect/>
           </a:stretch>
@@ -24078,6 +24024,7 @@
           <a:lstStyle/>
           <a:p>
             <a:pPr algn="ctr"/>
+            <a:endParaRPr/>
           </a:p>
         </p:txBody>
       </p:sp>
@@ -24225,6 +24172,7 @@
           <a:lstStyle/>
           <a:p>
             <a:pPr algn="ctr"/>
+            <a:endParaRPr/>
           </a:p>
         </p:txBody>
       </p:sp>
@@ -24372,6 +24320,7 @@
           <a:lstStyle/>
           <a:p>
             <a:pPr algn="ctr"/>
+            <a:endParaRPr/>
           </a:p>
         </p:txBody>
       </p:sp>
@@ -24519,6 +24468,7 @@
           <a:lstStyle/>
           <a:p>
             <a:pPr algn="ctr"/>
+            <a:endParaRPr/>
           </a:p>
         </p:txBody>
       </p:sp>
@@ -24700,6 +24650,7 @@
           <a:lstStyle/>
           <a:p>
             <a:pPr algn="ctr"/>
+            <a:endParaRPr/>
           </a:p>
         </p:txBody>
       </p:sp>
@@ -24881,6 +24832,7 @@
           <a:lstStyle/>
           <a:p>
             <a:pPr algn="ctr"/>
+            <a:endParaRPr/>
           </a:p>
         </p:txBody>
       </p:sp>
@@ -25028,7 +24980,7 @@
 </file>
 
 <file path=ppt/slides/slide5.xml><?xml version="1.0" encoding="utf-8"?>
-<p:sld xmlns:a="http://schemas.openxmlformats.org/drawingml/2006/main" xmlns:p="http://schemas.openxmlformats.org/presentationml/2006/main" xmlns:r="http://schemas.openxmlformats.org/officeDocument/2006/relationships">
+<p:sld xmlns:a="http://schemas.openxmlformats.org/drawingml/2006/main" xmlns:r="http://schemas.openxmlformats.org/officeDocument/2006/relationships" xmlns:p="http://schemas.openxmlformats.org/presentationml/2006/main">
   <p:cSld>
     <p:bg>
       <p:bgPr>
@@ -25044,7 +24996,14 @@
         <p:cNvGrpSpPr/>
         <p:nvPr/>
       </p:nvGrpSpPr>
-      <p:grpSpPr/>
+      <p:grpSpPr>
+        <a:xfrm>
+          <a:off x="0" y="0"/>
+          <a:ext cx="0" cy="0"/>
+          <a:chOff x="0" y="0"/>
+          <a:chExt cx="0" cy="0"/>
+        </a:xfrm>
+      </p:grpSpPr>
       <p:sp>
         <p:nvSpPr>
           <p:cNvPr id="2" name="tag:L1:tag"/>
@@ -25424,6 +25383,7 @@
           <a:lstStyle/>
           <a:p>
             <a:pPr algn="ctr"/>
+            <a:endParaRPr/>
           </a:p>
         </p:txBody>
       </p:sp>
@@ -26849,6 +26809,7 @@
           <a:lstStyle/>
           <a:p>
             <a:pPr algn="ctr"/>
+            <a:endParaRPr/>
           </a:p>
         </p:txBody>
       </p:sp>
@@ -27041,6 +27002,7 @@
           <a:lstStyle/>
           <a:p>
             <a:pPr algn="ctr"/>
+            <a:endParaRPr/>
           </a:p>
         </p:txBody>
       </p:sp>
@@ -27233,6 +27195,7 @@
           <a:lstStyle/>
           <a:p>
             <a:pPr algn="ctr"/>
+            <a:endParaRPr/>
           </a:p>
         </p:txBody>
       </p:sp>
@@ -27391,7 +27354,7 @@
 </file>
 
 <file path=ppt/slides/slide6.xml><?xml version="1.0" encoding="utf-8"?>
-<p:sld xmlns:a="http://schemas.openxmlformats.org/drawingml/2006/main" xmlns:p="http://schemas.openxmlformats.org/presentationml/2006/main" xmlns:r="http://schemas.openxmlformats.org/officeDocument/2006/relationships">
+<p:sld xmlns:a="http://schemas.openxmlformats.org/drawingml/2006/main" xmlns:r="http://schemas.openxmlformats.org/officeDocument/2006/relationships" xmlns:p="http://schemas.openxmlformats.org/presentationml/2006/main">
   <p:cSld>
     <p:bg>
       <p:bgPr>
@@ -27407,7 +27370,14 @@
         <p:cNvGrpSpPr/>
         <p:nvPr/>
       </p:nvGrpSpPr>
-      <p:grpSpPr/>
+      <p:grpSpPr>
+        <a:xfrm>
+          <a:off x="0" y="0"/>
+          <a:ext cx="0" cy="0"/>
+          <a:chOff x="0" y="0"/>
+          <a:chExt cx="0" cy="0"/>
+        </a:xfrm>
+      </p:grpSpPr>
       <p:sp>
         <p:nvSpPr>
           <p:cNvPr id="2" name="tag:L1:tag"/>
@@ -27697,6 +27667,7 @@
           <a:lstStyle/>
           <a:p>
             <a:pPr algn="ctr"/>
+            <a:endParaRPr/>
           </a:p>
         </p:txBody>
       </p:sp>
@@ -28969,6 +28940,7 @@
           <a:lstStyle/>
           <a:p>
             <a:pPr algn="ctr"/>
+            <a:endParaRPr/>
           </a:p>
         </p:txBody>
       </p:sp>
@@ -29251,6 +29223,7 @@
           <a:lstStyle/>
           <a:p>
             <a:pPr algn="ctr"/>
+            <a:endParaRPr/>
           </a:p>
         </p:txBody>
       </p:sp>
@@ -29467,7 +29440,7 @@
           </a:bodyPr>
           <a:lstStyle/>
           <a:p>
-            <a:pPr algn="l" marL="164592" indent="-164592">
+            <a:pPr marL="164592" indent="-164592" algn="l">
               <a:lnSpc>
                 <a:spcPts val="1540"/>
               </a:lnSpc>
@@ -29493,7 +29466,7 @@
             </a:r>
           </a:p>
           <a:p>
-            <a:pPr algn="l" marL="164592" indent="-164592">
+            <a:pPr marL="164592" indent="-164592" algn="l">
               <a:lnSpc>
                 <a:spcPts val="1540"/>
               </a:lnSpc>
@@ -29550,7 +29523,7 @@
 </file>
 
 <file path=ppt/slides/slide7.xml><?xml version="1.0" encoding="utf-8"?>
-<p:sld xmlns:a="http://schemas.openxmlformats.org/drawingml/2006/main" xmlns:p="http://schemas.openxmlformats.org/presentationml/2006/main" xmlns:r="http://schemas.openxmlformats.org/officeDocument/2006/relationships">
+<p:sld xmlns:a="http://schemas.openxmlformats.org/drawingml/2006/main" xmlns:r="http://schemas.openxmlformats.org/officeDocument/2006/relationships" xmlns:p="http://schemas.openxmlformats.org/presentationml/2006/main">
   <p:cSld>
     <p:bg>
       <p:bgPr>
@@ -29566,7 +29539,14 @@
         <p:cNvGrpSpPr/>
         <p:nvPr/>
       </p:nvGrpSpPr>
-      <p:grpSpPr/>
+      <p:grpSpPr>
+        <a:xfrm>
+          <a:off x="0" y="0"/>
+          <a:ext cx="0" cy="0"/>
+          <a:chOff x="0" y="0"/>
+          <a:chExt cx="0" cy="0"/>
+        </a:xfrm>
+      </p:grpSpPr>
       <p:sp>
         <p:nvSpPr>
           <p:cNvPr id="2" name="tag:L1:tag"/>
@@ -29856,6 +29836,7 @@
           <a:lstStyle/>
           <a:p>
             <a:pPr algn="ctr"/>
+            <a:endParaRPr/>
           </a:p>
         </p:txBody>
       </p:sp>
@@ -29906,22 +29887,22 @@
       </p:sp>
       <p:pic>
         <p:nvPicPr>
-          <p:cNvPr id="10" name="pic:map" descr="repair_process_map.png"/>
+          <p:cNvPr id="10" name="pic:map" descr="process_map_deck.png"/>
           <p:cNvPicPr>
             <a:picLocks noChangeAspect="1"/>
           </p:cNvPicPr>
           <p:nvPr/>
         </p:nvPicPr>
         <p:blipFill>
-          <a:blip r:embed="rId2"/>
+          <a:blip r:embed="rId3"/>
           <a:stretch>
             <a:fillRect/>
           </a:stretch>
         </p:blipFill>
         <p:spPr>
           <a:xfrm>
-            <a:off x="1315652" y="1868678"/>
-            <a:ext cx="9560390" cy="2926080"/>
+            <a:off x="964266" y="1868678"/>
+            <a:ext cx="10263163" cy="2926080"/>
           </a:xfrm>
           <a:prstGeom prst="rect">
             <a:avLst/>
@@ -29971,6 +29952,7 @@
           <a:lstStyle/>
           <a:p>
             <a:pPr algn="ctr"/>
+            <a:endParaRPr/>
           </a:p>
         </p:txBody>
       </p:sp>
@@ -30151,6 +30133,7 @@
           <a:lstStyle/>
           <a:p>
             <a:pPr algn="ctr"/>
+            <a:endParaRPr/>
           </a:p>
         </p:txBody>
       </p:sp>
@@ -30353,6 +30336,7 @@
           <a:lstStyle/>
           <a:p>
             <a:pPr algn="ctr"/>
+            <a:endParaRPr/>
           </a:p>
         </p:txBody>
       </p:sp>
@@ -30423,7 +30407,7 @@
           </a:bodyPr>
           <a:lstStyle/>
           <a:p>
-            <a:pPr algn="l" marL="164592" indent="-164592">
+            <a:pPr marL="164592" indent="-164592" algn="l">
               <a:lnSpc>
                 <a:spcPts val="1610"/>
               </a:lnSpc>
@@ -30471,7 +30455,7 @@
             </a:r>
           </a:p>
           <a:p>
-            <a:pPr algn="l" marL="164592" indent="-164592">
+            <a:pPr marL="164592" indent="-164592" algn="l">
               <a:lnSpc>
                 <a:spcPts val="1610"/>
               </a:lnSpc>
@@ -30550,7 +30534,7 @@
 </file>
 
 <file path=ppt/slides/slide8.xml><?xml version="1.0" encoding="utf-8"?>
-<p:sld xmlns:a="http://schemas.openxmlformats.org/drawingml/2006/main" xmlns:p="http://schemas.openxmlformats.org/presentationml/2006/main" xmlns:r="http://schemas.openxmlformats.org/officeDocument/2006/relationships">
+<p:sld xmlns:a="http://schemas.openxmlformats.org/drawingml/2006/main" xmlns:r="http://schemas.openxmlformats.org/officeDocument/2006/relationships" xmlns:p="http://schemas.openxmlformats.org/presentationml/2006/main">
   <p:cSld>
     <p:bg>
       <p:bgPr>
@@ -30566,7 +30550,14 @@
         <p:cNvGrpSpPr/>
         <p:nvPr/>
       </p:nvGrpSpPr>
-      <p:grpSpPr/>
+      <p:grpSpPr>
+        <a:xfrm>
+          <a:off x="0" y="0"/>
+          <a:ext cx="0" cy="0"/>
+          <a:chOff x="0" y="0"/>
+          <a:chExt cx="0" cy="0"/>
+        </a:xfrm>
+      </p:grpSpPr>
       <p:sp>
         <p:nvSpPr>
           <p:cNvPr id="2" name="tag:L1:tag"/>
@@ -30901,6 +30892,7 @@
           <a:lstStyle/>
           <a:p>
             <a:pPr algn="ctr"/>
+            <a:endParaRPr/>
           </a:p>
         </p:txBody>
       </p:sp>
@@ -30958,7 +30950,7 @@
           <p:nvPr/>
         </p:nvPicPr>
         <p:blipFill>
-          <a:blip r:embed="rId2"/>
+          <a:blip r:embed="rId3"/>
           <a:stretch>
             <a:fillRect/>
           </a:stretch>
@@ -31016,6 +31008,7 @@
           <a:lstStyle/>
           <a:p>
             <a:pPr algn="ctr"/>
+            <a:endParaRPr/>
           </a:p>
         </p:txBody>
       </p:sp>
@@ -31208,6 +31201,7 @@
           <a:lstStyle/>
           <a:p>
             <a:pPr algn="ctr"/>
+            <a:endParaRPr/>
           </a:p>
         </p:txBody>
       </p:sp>
@@ -31400,6 +31394,7 @@
           <a:lstStyle/>
           <a:p>
             <a:pPr algn="ctr"/>
+            <a:endParaRPr/>
           </a:p>
         </p:txBody>
       </p:sp>
@@ -31558,7 +31553,7 @@
 </file>
 
 <file path=ppt/slides/slide9.xml><?xml version="1.0" encoding="utf-8"?>
-<p:sld xmlns:a="http://schemas.openxmlformats.org/drawingml/2006/main" xmlns:p="http://schemas.openxmlformats.org/presentationml/2006/main" xmlns:r="http://schemas.openxmlformats.org/officeDocument/2006/relationships">
+<p:sld xmlns:a="http://schemas.openxmlformats.org/drawingml/2006/main" xmlns:r="http://schemas.openxmlformats.org/officeDocument/2006/relationships" xmlns:p="http://schemas.openxmlformats.org/presentationml/2006/main">
   <p:cSld>
     <p:bg>
       <p:bgPr>
@@ -31574,7 +31569,14 @@
         <p:cNvGrpSpPr/>
         <p:nvPr/>
       </p:nvGrpSpPr>
-      <p:grpSpPr/>
+      <p:grpSpPr>
+        <a:xfrm>
+          <a:off x="0" y="0"/>
+          <a:ext cx="0" cy="0"/>
+          <a:chOff x="0" y="0"/>
+          <a:chExt cx="0" cy="0"/>
+        </a:xfrm>
+      </p:grpSpPr>
       <p:sp>
         <p:nvSpPr>
           <p:cNvPr id="2" name="tag:L1:tag"/>
@@ -31909,6 +31911,7 @@
           <a:lstStyle/>
           <a:p>
             <a:pPr algn="ctr"/>
+            <a:endParaRPr/>
           </a:p>
         </p:txBody>
       </p:sp>
@@ -31966,7 +31969,7 @@
           <p:nvPr/>
         </p:nvPicPr>
         <p:blipFill>
-          <a:blip r:embed="rId2"/>
+          <a:blip r:embed="rId3"/>
           <a:stretch>
             <a:fillRect/>
           </a:stretch>
@@ -32024,6 +32027,7 @@
           <a:lstStyle/>
           <a:p>
             <a:pPr algn="ctr"/>
+            <a:endParaRPr/>
           </a:p>
         </p:txBody>
       </p:sp>
@@ -32081,7 +32085,7 @@
           <p:nvPr/>
         </p:nvPicPr>
         <p:blipFill>
-          <a:blip r:embed="rId3"/>
+          <a:blip r:embed="rId4"/>
           <a:stretch>
             <a:fillRect/>
           </a:stretch>
@@ -32139,6 +32143,7 @@
           <a:lstStyle/>
           <a:p>
             <a:pPr algn="ctr"/>
+            <a:endParaRPr/>
           </a:p>
         </p:txBody>
       </p:sp>
@@ -32196,7 +32201,7 @@
           <p:nvPr/>
         </p:nvPicPr>
         <p:blipFill>
-          <a:blip r:embed="rId4"/>
+          <a:blip r:embed="rId5"/>
           <a:stretch>
             <a:fillRect/>
           </a:stretch>
@@ -32254,6 +32259,7 @@
           <a:lstStyle/>
           <a:p>
             <a:pPr algn="ctr"/>
+            <a:endParaRPr/>
           </a:p>
         </p:txBody>
       </p:sp>
@@ -32467,6 +32473,7 @@
           <a:lstStyle/>
           <a:p>
             <a:pPr algn="ctr"/>
+            <a:endParaRPr/>
           </a:p>
         </p:txBody>
       </p:sp>
@@ -32537,7 +32544,7 @@
           </a:bodyPr>
           <a:lstStyle/>
           <a:p>
-            <a:pPr algn="l" marL="164592" indent="-164592">
+            <a:pPr marL="164592" indent="-164592" algn="l">
               <a:lnSpc>
                 <a:spcPts val="1610"/>
               </a:lnSpc>
@@ -32574,7 +32581,7 @@
             </a:r>
           </a:p>
           <a:p>
-            <a:pPr algn="l" marL="164592" indent="-164592">
+            <a:pPr marL="164592" indent="-164592" algn="l">
               <a:lnSpc>
                 <a:spcPts val="1610"/>
               </a:lnSpc>
@@ -32611,7 +32618,7 @@
             </a:r>
           </a:p>
           <a:p>
-            <a:pPr algn="l" marL="164592" indent="-164592">
+            <a:pPr marL="164592" indent="-164592" algn="l">
               <a:lnSpc>
                 <a:spcPts val="1610"/>
               </a:lnSpc>
@@ -32637,7 +32644,7 @@
             </a:r>
           </a:p>
           <a:p>
-            <a:pPr algn="l" marL="164592" indent="-164592">
+            <a:pPr marL="164592" indent="-164592" algn="l">
               <a:lnSpc>
                 <a:spcPts val="1610"/>
               </a:lnSpc>
@@ -32707,6 +32714,7 @@
           <a:lstStyle/>
           <a:p>
             <a:pPr algn="ctr"/>
+            <a:endParaRPr/>
           </a:p>
         </p:txBody>
       </p:sp>
@@ -33230,7 +33238,7 @@
 </file>
 
 <file path=ppt/theme/theme2.xml><?xml version="1.0" encoding="utf-8"?>
-<a:theme xmlns:a="http://schemas.openxmlformats.org/drawingml/2006/main" name="Office Theme">
+<a:theme xmlns:a="http://schemas.openxmlformats.org/drawingml/2006/main" name="Office 테마">
   <a:themeElements>
     <a:clrScheme name="Office">
       <a:dk1>
@@ -33240,44 +33248,44 @@
         <a:sysClr val="window" lastClr="FFFFFF"/>
       </a:lt1>
       <a:dk2>
-        <a:srgbClr val="1F497D"/>
+        <a:srgbClr val="44546A"/>
       </a:dk2>
       <a:lt2>
-        <a:srgbClr val="EEECE1"/>
+        <a:srgbClr val="E7E6E6"/>
       </a:lt2>
       <a:accent1>
-        <a:srgbClr val="4F81BD"/>
+        <a:srgbClr val="4472C4"/>
       </a:accent1>
       <a:accent2>
-        <a:srgbClr val="C0504D"/>
+        <a:srgbClr val="ED7D31"/>
       </a:accent2>
       <a:accent3>
-        <a:srgbClr val="9BBB59"/>
+        <a:srgbClr val="A5A5A5"/>
       </a:accent3>
       <a:accent4>
-        <a:srgbClr val="8064A2"/>
+        <a:srgbClr val="FFC000"/>
       </a:accent4>
       <a:accent5>
-        <a:srgbClr val="4BACC6"/>
+        <a:srgbClr val="5B9BD5"/>
       </a:accent5>
       <a:accent6>
-        <a:srgbClr val="F79646"/>
+        <a:srgbClr val="70AD47"/>
       </a:accent6>
       <a:hlink>
-        <a:srgbClr val="0000FF"/>
+        <a:srgbClr val="0563C1"/>
       </a:hlink>
       <a:folHlink>
-        <a:srgbClr val="800080"/>
+        <a:srgbClr val="954F72"/>
       </a:folHlink>
     </a:clrScheme>
     <a:fontScheme name="Office">
       <a:majorFont>
-        <a:latin typeface="Calibri"/>
+        <a:latin typeface="맑은 고딕" panose="020F0302020204030204"/>
         <a:ea typeface=""/>
         <a:cs typeface=""/>
-        <a:font script="Jpan" typeface="ＭＳ Ｐゴシック"/>
+        <a:font script="Jpan" typeface="游ゴシック Light"/>
         <a:font script="Hang" typeface="맑은 고딕"/>
-        <a:font script="Hans" typeface="宋体"/>
+        <a:font script="Hans" typeface="等线 Light"/>
         <a:font script="Hant" typeface="新細明體"/>
         <a:font script="Arab" typeface="Times New Roman"/>
         <a:font script="Hebr" typeface="Times New Roman"/>
@@ -33305,14 +33313,31 @@
         <a:font script="Viet" typeface="Times New Roman"/>
         <a:font script="Uigh" typeface="Microsoft Uighur"/>
         <a:font script="Geor" typeface="Sylfaen"/>
+        <a:font script="Armn" typeface="Arial"/>
+        <a:font script="Bugi" typeface="Leelawadee UI"/>
+        <a:font script="Bopo" typeface="Microsoft JhengHei"/>
+        <a:font script="Java" typeface="Javanese Text"/>
+        <a:font script="Lisu" typeface="Segoe UI"/>
+        <a:font script="Mymr" typeface="Myanmar Text"/>
+        <a:font script="Nkoo" typeface="Ebrima"/>
+        <a:font script="Olck" typeface="Nirmala UI"/>
+        <a:font script="Osma" typeface="Ebrima"/>
+        <a:font script="Phag" typeface="Phagspa"/>
+        <a:font script="Syrn" typeface="Estrangelo Edessa"/>
+        <a:font script="Syrj" typeface="Estrangelo Edessa"/>
+        <a:font script="Syre" typeface="Estrangelo Edessa"/>
+        <a:font script="Sora" typeface="Nirmala UI"/>
+        <a:font script="Tale" typeface="Microsoft Tai Le"/>
+        <a:font script="Talu" typeface="Microsoft New Tai Lue"/>
+        <a:font script="Tfng" typeface="Ebrima"/>
       </a:majorFont>
       <a:minorFont>
-        <a:latin typeface="Calibri"/>
+        <a:latin typeface="맑은 고딕" panose="020F0502020204030204"/>
         <a:ea typeface=""/>
         <a:cs typeface=""/>
-        <a:font script="Jpan" typeface="ＭＳ Ｐゴシック"/>
+        <a:font script="Jpan" typeface="游ゴシック"/>
         <a:font script="Hang" typeface="맑은 고딕"/>
-        <a:font script="Hans" typeface="宋体"/>
+        <a:font script="Hans" typeface="等线"/>
         <a:font script="Hant" typeface="新細明體"/>
         <a:font script="Arab" typeface="Arial"/>
         <a:font script="Hebr" typeface="Arial"/>
@@ -33340,6 +33365,23 @@
         <a:font script="Viet" typeface="Arial"/>
         <a:font script="Uigh" typeface="Microsoft Uighur"/>
         <a:font script="Geor" typeface="Sylfaen"/>
+        <a:font script="Armn" typeface="Arial"/>
+        <a:font script="Bugi" typeface="Leelawadee UI"/>
+        <a:font script="Bopo" typeface="Microsoft JhengHei"/>
+        <a:font script="Java" typeface="Javanese Text"/>
+        <a:font script="Lisu" typeface="Segoe UI"/>
+        <a:font script="Mymr" typeface="Myanmar Text"/>
+        <a:font script="Nkoo" typeface="Ebrima"/>
+        <a:font script="Olck" typeface="Nirmala UI"/>
+        <a:font script="Osma" typeface="Ebrima"/>
+        <a:font script="Phag" typeface="Phagspa"/>
+        <a:font script="Syrn" typeface="Estrangelo Edessa"/>
+        <a:font script="Syrj" typeface="Estrangelo Edessa"/>
+        <a:font script="Syre" typeface="Estrangelo Edessa"/>
+        <a:font script="Sora" typeface="Nirmala UI"/>
+        <a:font script="Tale" typeface="Microsoft Tai Le"/>
+        <a:font script="Talu" typeface="Microsoft New Tai Lue"/>
+        <a:font script="Tfng" typeface="Ebrima"/>
       </a:minorFont>
     </a:fontScheme>
     <a:fmtScheme name="Office">
@@ -33351,200 +33393,141 @@
           <a:gsLst>
             <a:gs pos="0">
               <a:schemeClr val="phClr">
-                <a:tint val="50000"/>
-                <a:satMod val="300000"/>
+                <a:lumMod val="110000"/>
+                <a:satMod val="105000"/>
+                <a:tint val="67000"/>
               </a:schemeClr>
             </a:gs>
-            <a:gs pos="35000">
+            <a:gs pos="50000">
               <a:schemeClr val="phClr">
-                <a:tint val="37000"/>
-                <a:satMod val="300000"/>
+                <a:lumMod val="105000"/>
+                <a:satMod val="103000"/>
+                <a:tint val="73000"/>
               </a:schemeClr>
             </a:gs>
             <a:gs pos="100000">
               <a:schemeClr val="phClr">
-                <a:tint val="15000"/>
-                <a:satMod val="350000"/>
+                <a:lumMod val="105000"/>
+                <a:satMod val="109000"/>
+                <a:tint val="81000"/>
               </a:schemeClr>
             </a:gs>
           </a:gsLst>
-          <a:lin ang="16200000" scaled="1"/>
+          <a:lin ang="5400000" scaled="0"/>
         </a:gradFill>
         <a:gradFill rotWithShape="1">
           <a:gsLst>
             <a:gs pos="0">
               <a:schemeClr val="phClr">
-                <a:tint val="100000"/>
+                <a:satMod val="103000"/>
+                <a:lumMod val="102000"/>
+                <a:tint val="94000"/>
+              </a:schemeClr>
+            </a:gs>
+            <a:gs pos="50000">
+              <a:schemeClr val="phClr">
+                <a:satMod val="110000"/>
+                <a:lumMod val="100000"/>
                 <a:shade val="100000"/>
-                <a:satMod val="130000"/>
               </a:schemeClr>
             </a:gs>
             <a:gs pos="100000">
               <a:schemeClr val="phClr">
-                <a:tint val="50000"/>
-                <a:shade val="100000"/>
-                <a:satMod val="350000"/>
+                <a:lumMod val="99000"/>
+                <a:satMod val="120000"/>
+                <a:shade val="78000"/>
               </a:schemeClr>
             </a:gs>
           </a:gsLst>
-          <a:lin ang="16200000" scaled="0"/>
+          <a:lin ang="5400000" scaled="0"/>
         </a:gradFill>
       </a:fillStyleLst>
       <a:lnStyleLst>
-        <a:ln w="9525" cap="flat" cmpd="sng" algn="ctr">
-          <a:solidFill>
-            <a:schemeClr val="phClr">
-              <a:shade val="95000"/>
-              <a:satMod val="105000"/>
-            </a:schemeClr>
-          </a:solidFill>
-          <a:prstDash val="solid"/>
-        </a:ln>
-        <a:ln w="25400" cap="flat" cmpd="sng" algn="ctr">
+        <a:ln w="6350" cap="flat" cmpd="sng" algn="ctr">
           <a:solidFill>
             <a:schemeClr val="phClr"/>
           </a:solidFill>
           <a:prstDash val="solid"/>
+          <a:miter lim="800000"/>
         </a:ln>
-        <a:ln w="38100" cap="flat" cmpd="sng" algn="ctr">
+        <a:ln w="12700" cap="flat" cmpd="sng" algn="ctr">
           <a:solidFill>
             <a:schemeClr val="phClr"/>
           </a:solidFill>
           <a:prstDash val="solid"/>
+          <a:miter lim="800000"/>
+        </a:ln>
+        <a:ln w="19050" cap="flat" cmpd="sng" algn="ctr">
+          <a:solidFill>
+            <a:schemeClr val="phClr"/>
+          </a:solidFill>
+          <a:prstDash val="solid"/>
+          <a:miter lim="800000"/>
         </a:ln>
       </a:lnStyleLst>
       <a:effectStyleLst>
         <a:effectStyle>
+          <a:effectLst/>
+        </a:effectStyle>
+        <a:effectStyle>
+          <a:effectLst/>
+        </a:effectStyle>
+        <a:effectStyle>
           <a:effectLst>
-            <a:outerShdw blurRad="40000" dist="20000" dir="5400000" rotWithShape="0">
+            <a:outerShdw blurRad="57150" dist="19050" dir="5400000" algn="ctr" rotWithShape="0">
               <a:srgbClr val="000000">
-                <a:alpha val="38000"/>
+                <a:alpha val="63000"/>
               </a:srgbClr>
             </a:outerShdw>
           </a:effectLst>
-        </a:effectStyle>
-        <a:effectStyle>
-          <a:effectLst>
-            <a:outerShdw blurRad="40000" dist="23000" dir="5400000" rotWithShape="0">
-              <a:srgbClr val="000000">
-                <a:alpha val="35000"/>
-              </a:srgbClr>
-            </a:outerShdw>
-          </a:effectLst>
-        </a:effectStyle>
-        <a:effectStyle>
-          <a:effectLst>
-            <a:outerShdw blurRad="40000" dist="23000" dir="5400000" rotWithShape="0">
-              <a:srgbClr val="000000">
-                <a:alpha val="35000"/>
-              </a:srgbClr>
-            </a:outerShdw>
-          </a:effectLst>
-          <a:scene3d>
-            <a:camera prst="orthographicFront">
-              <a:rot lat="0" lon="0" rev="0"/>
-            </a:camera>
-            <a:lightRig rig="threePt" dir="t">
-              <a:rot lat="0" lon="0" rev="1200000"/>
-            </a:lightRig>
-          </a:scene3d>
-          <a:sp3d>
-            <a:bevelT w="63500" h="25400"/>
-          </a:sp3d>
         </a:effectStyle>
       </a:effectStyleLst>
       <a:bgFillStyleLst>
         <a:solidFill>
           <a:schemeClr val="phClr"/>
         </a:solidFill>
+        <a:solidFill>
+          <a:schemeClr val="phClr">
+            <a:tint val="95000"/>
+            <a:satMod val="170000"/>
+          </a:schemeClr>
+        </a:solidFill>
         <a:gradFill rotWithShape="1">
           <a:gsLst>
             <a:gs pos="0">
               <a:schemeClr val="phClr">
-                <a:tint val="40000"/>
-                <a:satMod val="350000"/>
+                <a:tint val="93000"/>
+                <a:satMod val="150000"/>
+                <a:shade val="98000"/>
+                <a:lumMod val="102000"/>
               </a:schemeClr>
             </a:gs>
-            <a:gs pos="40000">
+            <a:gs pos="50000">
               <a:schemeClr val="phClr">
-                <a:tint val="45000"/>
-                <a:shade val="99000"/>
-                <a:satMod val="350000"/>
+                <a:tint val="98000"/>
+                <a:satMod val="130000"/>
+                <a:shade val="90000"/>
+                <a:lumMod val="103000"/>
               </a:schemeClr>
             </a:gs>
             <a:gs pos="100000">
               <a:schemeClr val="phClr">
-                <a:shade val="20000"/>
-                <a:satMod val="255000"/>
+                <a:shade val="63000"/>
+                <a:satMod val="120000"/>
               </a:schemeClr>
             </a:gs>
           </a:gsLst>
-          <a:path path="circle">
-            <a:fillToRect l="50000" t="-80000" r="50000" b="180000"/>
-          </a:path>
-        </a:gradFill>
-        <a:gradFill rotWithShape="1">
-          <a:gsLst>
-            <a:gs pos="0">
-              <a:schemeClr val="phClr">
-                <a:tint val="80000"/>
-                <a:satMod val="300000"/>
-              </a:schemeClr>
-            </a:gs>
-            <a:gs pos="100000">
-              <a:schemeClr val="phClr">
-                <a:shade val="30000"/>
-                <a:satMod val="200000"/>
-              </a:schemeClr>
-            </a:gs>
-          </a:gsLst>
-          <a:path path="circle">
-            <a:fillToRect l="50000" t="50000" r="50000" b="50000"/>
-          </a:path>
+          <a:lin ang="5400000" scaled="0"/>
         </a:gradFill>
       </a:bgFillStyleLst>
     </a:fmtScheme>
   </a:themeElements>
-  <a:objectDefaults>
-    <a:spDef>
-      <a:spPr/>
-      <a:bodyPr/>
-      <a:lstStyle/>
-      <a:style>
-        <a:lnRef idx="1">
-          <a:schemeClr val="accent1"/>
-        </a:lnRef>
-        <a:fillRef idx="3">
-          <a:schemeClr val="accent1"/>
-        </a:fillRef>
-        <a:effectRef idx="2">
-          <a:schemeClr val="accent1"/>
-        </a:effectRef>
-        <a:fontRef idx="minor">
-          <a:schemeClr val="lt1"/>
-        </a:fontRef>
-      </a:style>
-    </a:spDef>
-    <a:lnDef>
-      <a:spPr/>
-      <a:bodyPr/>
-      <a:lstStyle/>
-      <a:style>
-        <a:lnRef idx="2">
-          <a:schemeClr val="accent1"/>
-        </a:lnRef>
-        <a:fillRef idx="0">
-          <a:schemeClr val="accent1"/>
-        </a:fillRef>
-        <a:effectRef idx="1">
-          <a:schemeClr val="accent1"/>
-        </a:effectRef>
-        <a:fontRef idx="minor">
-          <a:schemeClr val="tx1"/>
-        </a:fontRef>
-      </a:style>
-    </a:lnDef>
-  </a:objectDefaults>
+  <a:objectDefaults/>
   <a:extraClrSchemeLst/>
+  <a:extLst>
+    <a:ext uri="{05A4C25C-085E-4340-85A3-A5531E510DB2}">
+      <thm15:themeFamily xmlns:thm15="http://schemas.microsoft.com/office/thememl/2012/main" name="Office Theme" id="{62F939B6-93AF-4DB8-9C6B-D6C7DFDC589F}" vid="{4A3C46E8-61CC-4603-A589-7422A47A8E4A}"/>
+    </a:ext>
+  </a:extLst>
 </a:theme>
 </file>
--- a/submission/puzzledata_repair_report.pptx
+++ b/submission/puzzledata_repair_report.pptx
@@ -142,21 +142,21 @@
   <p:extLst>
     <p:ext uri="{521415D9-36F7-43E2-AB2F-B90AF26B5E84}">
       <p14:sectionLst xmlns:p14="http://schemas.microsoft.com/office/powerpoint/2010/main">
-        <p14:section name="Part 00 · 인트로" id="{A61B80BD-90E6-433F-9D43-43FE56B17982}">
+        <p14:section name="Part 00 · 인트로" id="{8375A178-4210-4ED6-B4E4-3C447F628582}">
           <p14:sldIdLst>
             <p14:sldId id="256"/>
             <p14:sldId id="257"/>
             <p14:sldId id="258"/>
           </p14:sldIdLst>
         </p14:section>
-        <p14:section name="Part 01 · 데이터 진단" id="{8230E63B-9ED8-4FE4-B64D-B4903261E8A6}">
+        <p14:section name="Part 01 · 데이터 진단" id="{84B140B5-E073-4557-A968-529A1D184A1E}">
           <p14:sldIdLst>
             <p14:sldId id="259"/>
             <p14:sldId id="260"/>
             <p14:sldId id="261"/>
           </p14:sldIdLst>
         </p14:section>
-        <p14:section name="Part 02 · 병목 규명" id="{823FB230-6B2F-4492-9723-EB4EEDCF6F5E}">
+        <p14:section name="Part 02 · 병목 규명" id="{1567F654-1EA3-4E8A-A219-F36CF8E74EFA}">
           <p14:sldIdLst>
             <p14:sldId id="262"/>
             <p14:sldId id="263"/>
@@ -169,14 +169,14 @@
             <p14:sldId id="270"/>
           </p14:sldIdLst>
         </p14:section>
-        <p14:section name="Part 03 · 개선 전략" id="{C069E015-9E27-493C-859A-F678255D398C}">
+        <p14:section name="Part 03 · 개선 전략" id="{3ECE593B-1BDE-4D00-B46E-B237AB461F22}">
           <p14:sldIdLst>
             <p14:sldId id="271"/>
             <p14:sldId id="272"/>
             <p14:sldId id="273"/>
           </p14:sldIdLst>
         </p14:section>
-        <p14:section name="Part 04 · Q&amp;A" id="{7C197D7F-E718-4B45-B07A-9830F6ED98E6}">
+        <p14:section name="Part 04 · Q&amp;A" id="{AD9E5171-9D45-4796-9B62-2F9A55F1C85E}">
           <p14:sldIdLst>
             <p14:sldId id="274"/>
           </p14:sldIdLst>
@@ -226,7 +226,7 @@
     </p:spTree>
     <p:extLst>
       <p:ext uri="{BB962C8B-B14F-4D97-AF65-F5344CB8AC3E}">
-        <p14:creationId xmlns:p14="http://schemas.microsoft.com/office/powerpoint/2010/main" val="2181044953"/>
+        <p14:creationId xmlns:p14="http://schemas.microsoft.com/office/powerpoint/2010/main" val="635013916"/>
       </p:ext>
     </p:extLst>
   </p:cSld>
@@ -7510,7 +7510,7 @@
         <p:spPr>
           <a:xfrm>
             <a:off x="502920" y="5527687"/>
-            <a:ext cx="11185855" cy="588010"/>
+            <a:ext cx="11185855" cy="763384"/>
           </a:xfrm>
           <a:prstGeom prst="rect">
             <a:avLst/>
@@ -11025,7 +11025,7 @@
         <p:spPr>
           <a:xfrm>
             <a:off x="502920" y="1554480"/>
-            <a:ext cx="7818120" cy="3852926"/>
+            <a:ext cx="7818120" cy="4035806"/>
           </a:xfrm>
           <a:prstGeom prst="rect">
             <a:avLst/>
@@ -11124,8 +11124,8 @@
         </p:blipFill>
         <p:spPr>
           <a:xfrm>
-            <a:off x="873345" y="1896110"/>
-            <a:ext cx="7077269" cy="3383280"/>
+            <a:off x="682067" y="1896110"/>
+            <a:ext cx="7459824" cy="3566160"/>
           </a:xfrm>
           <a:prstGeom prst="rect">
             <a:avLst/>
@@ -11141,7 +11141,7 @@
         <p:spPr>
           <a:xfrm>
             <a:off x="8503920" y="1554480"/>
-            <a:ext cx="3184855" cy="1211156"/>
+            <a:ext cx="3184855" cy="1272116"/>
           </a:xfrm>
           <a:prstGeom prst="rect">
             <a:avLst/>
@@ -11333,8 +11333,8 @@
         </p:nvSpPr>
         <p:spPr>
           <a:xfrm>
-            <a:off x="8503920" y="2875364"/>
-            <a:ext cx="3184855" cy="1211156"/>
+            <a:off x="8503920" y="2936324"/>
+            <a:ext cx="3184855" cy="1272116"/>
           </a:xfrm>
           <a:prstGeom prst="rect">
             <a:avLst/>
@@ -11380,7 +11380,7 @@
         </p:nvSpPr>
         <p:spPr>
           <a:xfrm>
-            <a:off x="8659368" y="3030812"/>
+            <a:off x="8659368" y="3091772"/>
             <a:ext cx="2873959" cy="158750"/>
           </a:xfrm>
           <a:prstGeom prst="rect">
@@ -11425,7 +11425,7 @@
         </p:nvSpPr>
         <p:spPr>
           <a:xfrm>
-            <a:off x="8659368" y="3244426"/>
+            <a:off x="8659368" y="3305386"/>
             <a:ext cx="2873959" cy="341630"/>
           </a:xfrm>
           <a:prstGeom prst="rect">
@@ -11481,7 +11481,7 @@
         </p:nvSpPr>
         <p:spPr>
           <a:xfrm>
-            <a:off x="8659368" y="3640920"/>
+            <a:off x="8659368" y="3701880"/>
             <a:ext cx="2873959" cy="195580"/>
           </a:xfrm>
           <a:prstGeom prst="rect">
@@ -11526,8 +11526,8 @@
         </p:nvSpPr>
         <p:spPr>
           <a:xfrm>
-            <a:off x="8503920" y="4196249"/>
-            <a:ext cx="3184855" cy="1211156"/>
+            <a:off x="8503920" y="4318169"/>
+            <a:ext cx="3184855" cy="1272116"/>
           </a:xfrm>
           <a:prstGeom prst="rect">
             <a:avLst/>
@@ -11573,7 +11573,7 @@
         </p:nvSpPr>
         <p:spPr>
           <a:xfrm>
-            <a:off x="8659368" y="4351697"/>
+            <a:off x="8659368" y="4473617"/>
             <a:ext cx="2873959" cy="158750"/>
           </a:xfrm>
           <a:prstGeom prst="rect">
@@ -11618,7 +11618,7 @@
         </p:nvSpPr>
         <p:spPr>
           <a:xfrm>
-            <a:off x="8659368" y="4565311"/>
+            <a:off x="8659368" y="4687231"/>
             <a:ext cx="2873959" cy="341630"/>
           </a:xfrm>
           <a:prstGeom prst="rect">
@@ -11674,7 +11674,7 @@
         </p:nvSpPr>
         <p:spPr>
           <a:xfrm>
-            <a:off x="8659368" y="4961805"/>
+            <a:off x="8659368" y="5083725"/>
             <a:ext cx="2873959" cy="195580"/>
           </a:xfrm>
           <a:prstGeom prst="rect">
@@ -11719,7 +11719,7 @@
         </p:nvSpPr>
         <p:spPr>
           <a:xfrm>
-            <a:off x="502920" y="5544566"/>
+            <a:off x="502920" y="5727446"/>
             <a:ext cx="11185855" cy="533146"/>
           </a:xfrm>
           <a:prstGeom prst="rect">
@@ -11766,7 +11766,7 @@
         </p:nvSpPr>
         <p:spPr>
           <a:xfrm>
-            <a:off x="658368" y="5700014"/>
+            <a:off x="658368" y="5882894"/>
             <a:ext cx="10874959" cy="222250"/>
           </a:xfrm>
           <a:prstGeom prst="rect">
@@ -12180,7 +12180,7 @@
         <p:spPr>
           <a:xfrm>
             <a:off x="502920" y="1554480"/>
-            <a:ext cx="7818120" cy="3670046"/>
+            <a:ext cx="7818120" cy="3852926"/>
           </a:xfrm>
           <a:prstGeom prst="rect">
             <a:avLst/>
@@ -12279,8 +12279,8 @@
         </p:blipFill>
         <p:spPr>
           <a:xfrm>
-            <a:off x="972094" y="1896110"/>
-            <a:ext cx="6879771" cy="3200400"/>
+            <a:off x="775529" y="1896110"/>
+            <a:ext cx="7272901" cy="3383280"/>
           </a:xfrm>
           <a:prstGeom prst="rect">
             <a:avLst/>
@@ -12296,7 +12296,7 @@
         <p:spPr>
           <a:xfrm>
             <a:off x="8503920" y="1554480"/>
-            <a:ext cx="3184855" cy="1150196"/>
+            <a:ext cx="3184855" cy="1211156"/>
           </a:xfrm>
           <a:prstGeom prst="rect">
             <a:avLst/>
@@ -12488,8 +12488,8 @@
         </p:nvSpPr>
         <p:spPr>
           <a:xfrm>
-            <a:off x="8503920" y="2814404"/>
-            <a:ext cx="3184855" cy="1150196"/>
+            <a:off x="8503920" y="2875364"/>
+            <a:ext cx="3184855" cy="1211156"/>
           </a:xfrm>
           <a:prstGeom prst="rect">
             <a:avLst/>
@@ -12535,7 +12535,7 @@
         </p:nvSpPr>
         <p:spPr>
           <a:xfrm>
-            <a:off x="8659368" y="2969852"/>
+            <a:off x="8659368" y="3030812"/>
             <a:ext cx="2873959" cy="158750"/>
           </a:xfrm>
           <a:prstGeom prst="rect">
@@ -12580,7 +12580,7 @@
         </p:nvSpPr>
         <p:spPr>
           <a:xfrm>
-            <a:off x="8659368" y="3183466"/>
+            <a:off x="8659368" y="3244426"/>
             <a:ext cx="2873959" cy="341630"/>
           </a:xfrm>
           <a:prstGeom prst="rect">
@@ -12636,7 +12636,7 @@
         </p:nvSpPr>
         <p:spPr>
           <a:xfrm>
-            <a:off x="8659368" y="3579960"/>
+            <a:off x="8659368" y="3640920"/>
             <a:ext cx="2873959" cy="195580"/>
           </a:xfrm>
           <a:prstGeom prst="rect">
@@ -12681,8 +12681,8 @@
         </p:nvSpPr>
         <p:spPr>
           <a:xfrm>
-            <a:off x="8503920" y="4074329"/>
-            <a:ext cx="3184855" cy="1150196"/>
+            <a:off x="8503920" y="4196249"/>
+            <a:ext cx="3184855" cy="1211156"/>
           </a:xfrm>
           <a:prstGeom prst="rect">
             <a:avLst/>
@@ -12728,7 +12728,7 @@
         </p:nvSpPr>
         <p:spPr>
           <a:xfrm>
-            <a:off x="8659368" y="4229777"/>
+            <a:off x="8659368" y="4351697"/>
             <a:ext cx="2873959" cy="158750"/>
           </a:xfrm>
           <a:prstGeom prst="rect">
@@ -12773,7 +12773,7 @@
         </p:nvSpPr>
         <p:spPr>
           <a:xfrm>
-            <a:off x="8659368" y="4443391"/>
+            <a:off x="8659368" y="4565311"/>
             <a:ext cx="2873959" cy="341630"/>
           </a:xfrm>
           <a:prstGeom prst="rect">
@@ -12829,7 +12829,7 @@
         </p:nvSpPr>
         <p:spPr>
           <a:xfrm>
-            <a:off x="8659368" y="4839885"/>
+            <a:off x="8659368" y="4961805"/>
             <a:ext cx="2873959" cy="195580"/>
           </a:xfrm>
           <a:prstGeom prst="rect">
@@ -12874,7 +12874,7 @@
         </p:nvSpPr>
         <p:spPr>
           <a:xfrm>
-            <a:off x="502920" y="5361686"/>
+            <a:off x="502920" y="5544566"/>
             <a:ext cx="11185855" cy="755396"/>
           </a:xfrm>
           <a:prstGeom prst="rect">
@@ -12921,7 +12921,7 @@
         </p:nvSpPr>
         <p:spPr>
           <a:xfrm>
-            <a:off x="658368" y="5517134"/>
+            <a:off x="658368" y="5700014"/>
             <a:ext cx="10874959" cy="444500"/>
           </a:xfrm>
           <a:prstGeom prst="rect">
@@ -19130,7 +19130,7 @@
         <p:spPr>
           <a:xfrm>
             <a:off x="502920" y="1554480"/>
-            <a:ext cx="5760720" cy="1362456"/>
+            <a:ext cx="5760720" cy="1484376"/>
           </a:xfrm>
           <a:prstGeom prst="rect">
             <a:avLst/>
@@ -19311,8 +19311,8 @@
         </p:nvSpPr>
         <p:spPr>
           <a:xfrm>
-            <a:off x="502920" y="3044952"/>
-            <a:ext cx="5760720" cy="1362456"/>
+            <a:off x="502920" y="3166872"/>
+            <a:ext cx="5760720" cy="1484376"/>
           </a:xfrm>
           <a:prstGeom prst="rect">
             <a:avLst/>
@@ -19358,7 +19358,7 @@
         </p:nvSpPr>
         <p:spPr>
           <a:xfrm>
-            <a:off x="704088" y="3246120"/>
+            <a:off x="704088" y="3368040"/>
             <a:ext cx="5358383" cy="158750"/>
           </a:xfrm>
           <a:prstGeom prst="rect">
@@ -19403,7 +19403,7 @@
         </p:nvSpPr>
         <p:spPr>
           <a:xfrm>
-            <a:off x="704088" y="3459734"/>
+            <a:off x="704088" y="3581654"/>
             <a:ext cx="5358383" cy="266700"/>
           </a:xfrm>
           <a:prstGeom prst="rect">
@@ -19448,7 +19448,7 @@
         </p:nvSpPr>
         <p:spPr>
           <a:xfrm>
-            <a:off x="704088" y="3781298"/>
+            <a:off x="704088" y="3903218"/>
             <a:ext cx="5358383" cy="213360"/>
           </a:xfrm>
           <a:prstGeom prst="rect">
@@ -19493,8 +19493,8 @@
         </p:nvSpPr>
         <p:spPr>
           <a:xfrm>
-            <a:off x="502920" y="4535424"/>
-            <a:ext cx="5760720" cy="1362456"/>
+            <a:off x="502920" y="4779264"/>
+            <a:ext cx="5760720" cy="1484376"/>
           </a:xfrm>
           <a:prstGeom prst="rect">
             <a:avLst/>
@@ -19540,7 +19540,7 @@
         </p:nvSpPr>
         <p:spPr>
           <a:xfrm>
-            <a:off x="704088" y="4736592"/>
+            <a:off x="704088" y="4980432"/>
             <a:ext cx="5358383" cy="158750"/>
           </a:xfrm>
           <a:prstGeom prst="rect">
@@ -19585,7 +19585,7 @@
         </p:nvSpPr>
         <p:spPr>
           <a:xfrm>
-            <a:off x="704088" y="4950206"/>
+            <a:off x="704088" y="5194046"/>
             <a:ext cx="5358383" cy="266700"/>
           </a:xfrm>
           <a:prstGeom prst="rect">
@@ -19630,7 +19630,7 @@
         </p:nvSpPr>
         <p:spPr>
           <a:xfrm>
-            <a:off x="704088" y="5271770"/>
+            <a:off x="704088" y="5515610"/>
             <a:ext cx="5358383" cy="213360"/>
           </a:xfrm>
           <a:prstGeom prst="rect">
@@ -19676,7 +19676,7 @@
         <p:spPr>
           <a:xfrm>
             <a:off x="6446520" y="1554480"/>
-            <a:ext cx="5242255" cy="4343400"/>
+            <a:ext cx="5242255" cy="4709160"/>
           </a:xfrm>
           <a:prstGeom prst="rect">
             <a:avLst/>
@@ -20272,7 +20272,7 @@
         <p:spPr>
           <a:xfrm>
             <a:off x="502920" y="1600200"/>
-            <a:ext cx="2659303" cy="4297680"/>
+            <a:ext cx="2659303" cy="4617720"/>
           </a:xfrm>
           <a:prstGeom prst="rect">
             <a:avLst/>
@@ -20641,7 +20641,7 @@
         </p:nvSpPr>
         <p:spPr>
           <a:xfrm>
-            <a:off x="722376" y="5084064"/>
+            <a:off x="722376" y="5404103"/>
             <a:ext cx="2220391" cy="594359"/>
           </a:xfrm>
           <a:prstGeom prst="rect">
@@ -20711,7 +20711,7 @@
         <p:spPr>
           <a:xfrm>
             <a:off x="3345103" y="1600200"/>
-            <a:ext cx="2659303" cy="4297680"/>
+            <a:ext cx="2659303" cy="4617720"/>
           </a:xfrm>
           <a:prstGeom prst="rect">
             <a:avLst/>
@@ -21085,7 +21085,7 @@
         </p:nvSpPr>
         <p:spPr>
           <a:xfrm>
-            <a:off x="3564559" y="5084064"/>
+            <a:off x="3564559" y="5404103"/>
             <a:ext cx="2220391" cy="594359"/>
           </a:xfrm>
           <a:prstGeom prst="rect">
@@ -21155,7 +21155,7 @@
         <p:spPr>
           <a:xfrm>
             <a:off x="6187287" y="1600200"/>
-            <a:ext cx="2659303" cy="4297680"/>
+            <a:ext cx="2659303" cy="4617720"/>
           </a:xfrm>
           <a:prstGeom prst="rect">
             <a:avLst/>
@@ -21545,7 +21545,7 @@
         </p:nvSpPr>
         <p:spPr>
           <a:xfrm>
-            <a:off x="6406743" y="5084064"/>
+            <a:off x="6406743" y="5404103"/>
             <a:ext cx="2220391" cy="594359"/>
           </a:xfrm>
           <a:prstGeom prst="rect">
@@ -21615,7 +21615,7 @@
         <p:spPr>
           <a:xfrm>
             <a:off x="9029471" y="1600200"/>
-            <a:ext cx="2659303" cy="4297680"/>
+            <a:ext cx="2659303" cy="4617720"/>
           </a:xfrm>
           <a:prstGeom prst="rect">
             <a:avLst/>
@@ -21890,7 +21890,7 @@
         </p:nvSpPr>
         <p:spPr>
           <a:xfrm>
-            <a:off x="9248927" y="5279644"/>
+            <a:off x="9248927" y="5599684"/>
             <a:ext cx="2220391" cy="398780"/>
           </a:xfrm>
           <a:prstGeom prst="rect">
@@ -23973,8 +23973,8 @@
         </p:blipFill>
         <p:spPr>
           <a:xfrm>
-            <a:off x="1193227" y="1941830"/>
-            <a:ext cx="6757544" cy="3017520"/>
+            <a:off x="1193689" y="1941830"/>
+            <a:ext cx="6756620" cy="3017520"/>
           </a:xfrm>
           <a:prstGeom prst="rect">
             <a:avLst/>
@@ -31877,7 +31877,7 @@
         <p:spPr>
           <a:xfrm>
             <a:off x="502920" y="1618488"/>
-            <a:ext cx="3606698" cy="2480045"/>
+            <a:ext cx="3606698" cy="2784651"/>
           </a:xfrm>
           <a:prstGeom prst="rect">
             <a:avLst/>
@@ -31977,7 +31977,7 @@
         <p:spPr>
           <a:xfrm>
             <a:off x="630936" y="1960118"/>
-            <a:ext cx="3350666" cy="2010399"/>
+            <a:ext cx="3350666" cy="2315005"/>
           </a:xfrm>
           <a:prstGeom prst="rect">
             <a:avLst/>
@@ -31993,7 +31993,7 @@
         <p:spPr>
           <a:xfrm>
             <a:off x="4292498" y="1618488"/>
-            <a:ext cx="3606698" cy="2480045"/>
+            <a:ext cx="3606698" cy="2784651"/>
           </a:xfrm>
           <a:prstGeom prst="rect">
             <a:avLst/>
@@ -32093,7 +32093,7 @@
         <p:spPr>
           <a:xfrm>
             <a:off x="4420514" y="1960118"/>
-            <a:ext cx="3350666" cy="2010399"/>
+            <a:ext cx="3350666" cy="2315005"/>
           </a:xfrm>
           <a:prstGeom prst="rect">
             <a:avLst/>
@@ -32109,7 +32109,7 @@
         <p:spPr>
           <a:xfrm>
             <a:off x="8082076" y="1618488"/>
-            <a:ext cx="3606698" cy="2480045"/>
+            <a:ext cx="3606698" cy="2784651"/>
           </a:xfrm>
           <a:prstGeom prst="rect">
             <a:avLst/>
@@ -32209,7 +32209,7 @@
         <p:spPr>
           <a:xfrm>
             <a:off x="8210092" y="1960118"/>
-            <a:ext cx="3350666" cy="2010399"/>
+            <a:ext cx="3350666" cy="2315005"/>
           </a:xfrm>
           <a:prstGeom prst="rect">
             <a:avLst/>
@@ -32224,8 +32224,8 @@
         </p:nvSpPr>
         <p:spPr>
           <a:xfrm>
-            <a:off x="502920" y="4235693"/>
-            <a:ext cx="3606698" cy="1609852"/>
+            <a:off x="502920" y="4540299"/>
+            <a:ext cx="3606698" cy="1750772"/>
           </a:xfrm>
           <a:prstGeom prst="rect">
             <a:avLst/>
@@ -32271,7 +32271,7 @@
         </p:nvSpPr>
         <p:spPr>
           <a:xfrm>
-            <a:off x="685800" y="4418573"/>
+            <a:off x="685800" y="4723179"/>
             <a:ext cx="3240938" cy="158750"/>
           </a:xfrm>
           <a:prstGeom prst="rect">
@@ -32316,7 +32316,7 @@
         </p:nvSpPr>
         <p:spPr>
           <a:xfrm>
-            <a:off x="685800" y="4632187"/>
+            <a:off x="685800" y="4936793"/>
             <a:ext cx="3240938" cy="511810"/>
           </a:xfrm>
           <a:prstGeom prst="rect">
@@ -32372,7 +32372,7 @@
         </p:nvSpPr>
         <p:spPr>
           <a:xfrm>
-            <a:off x="685800" y="5198861"/>
+            <a:off x="685800" y="5503467"/>
             <a:ext cx="3240938" cy="408940"/>
           </a:xfrm>
           <a:prstGeom prst="rect">
@@ -32438,8 +32438,8 @@
         </p:nvSpPr>
         <p:spPr>
           <a:xfrm>
-            <a:off x="4292498" y="4235693"/>
-            <a:ext cx="3606698" cy="1609852"/>
+            <a:off x="4292498" y="4540299"/>
+            <a:ext cx="3606698" cy="1750772"/>
           </a:xfrm>
           <a:prstGeom prst="rect">
             <a:avLst/>
@@ -32485,7 +32485,7 @@
         </p:nvSpPr>
         <p:spPr>
           <a:xfrm>
-            <a:off x="4475378" y="4418573"/>
+            <a:off x="4475378" y="4723179"/>
             <a:ext cx="3240938" cy="158750"/>
           </a:xfrm>
           <a:prstGeom prst="rect">
@@ -32530,7 +32530,7 @@
         </p:nvSpPr>
         <p:spPr>
           <a:xfrm>
-            <a:off x="4475378" y="4632187"/>
+            <a:off x="4475378" y="4936793"/>
             <a:ext cx="3240938" cy="932180"/>
           </a:xfrm>
           <a:prstGeom prst="rect">
@@ -32679,8 +32679,8 @@
         </p:nvSpPr>
         <p:spPr>
           <a:xfrm>
-            <a:off x="8082076" y="4235693"/>
-            <a:ext cx="3606698" cy="1609852"/>
+            <a:off x="8082076" y="4540299"/>
+            <a:ext cx="3606698" cy="1750772"/>
           </a:xfrm>
           <a:prstGeom prst="rect">
             <a:avLst/>
@@ -32726,7 +32726,7 @@
         </p:nvSpPr>
         <p:spPr>
           <a:xfrm>
-            <a:off x="8264956" y="4418573"/>
+            <a:off x="8264956" y="4723179"/>
             <a:ext cx="3240938" cy="158750"/>
           </a:xfrm>
           <a:prstGeom prst="rect">
@@ -32771,7 +32771,7 @@
         </p:nvSpPr>
         <p:spPr>
           <a:xfrm>
-            <a:off x="8264956" y="4632187"/>
+            <a:off x="8264956" y="4936793"/>
             <a:ext cx="3240938" cy="511810"/>
           </a:xfrm>
           <a:prstGeom prst="rect">
@@ -32827,7 +32827,7 @@
         </p:nvSpPr>
         <p:spPr>
           <a:xfrm>
-            <a:off x="8264956" y="5198861"/>
+            <a:off x="8264956" y="5503467"/>
             <a:ext cx="3240938" cy="204470"/>
           </a:xfrm>
           <a:prstGeom prst="rect">
@@ -32872,7 +32872,7 @@
         </p:nvSpPr>
         <p:spPr>
           <a:xfrm>
-            <a:off x="8264956" y="5458195"/>
+            <a:off x="8264956" y="5762801"/>
             <a:ext cx="3240938" cy="204470"/>
           </a:xfrm>
           <a:prstGeom prst="rect">

--- a/submission/puzzledata_repair_report.pptx
+++ b/submission/puzzledata_repair_report.pptx
@@ -142,21 +142,21 @@
   <p:extLst>
     <p:ext uri="{521415D9-36F7-43E2-AB2F-B90AF26B5E84}">
       <p14:sectionLst xmlns:p14="http://schemas.microsoft.com/office/powerpoint/2010/main">
-        <p14:section name="Part 00 · 인트로" id="{8375A178-4210-4ED6-B4E4-3C447F628582}">
+        <p14:section name="Part 00 · 인트로" id="{DC30DD41-23B4-4C3A-9C53-77C2A2267E8D}">
           <p14:sldIdLst>
             <p14:sldId id="256"/>
             <p14:sldId id="257"/>
             <p14:sldId id="258"/>
           </p14:sldIdLst>
         </p14:section>
-        <p14:section name="Part 01 · 데이터 진단" id="{84B140B5-E073-4557-A968-529A1D184A1E}">
+        <p14:section name="Part 01 · 데이터 진단" id="{39F1D208-D008-41CD-B216-DC98744287AF}">
           <p14:sldIdLst>
             <p14:sldId id="259"/>
             <p14:sldId id="260"/>
             <p14:sldId id="261"/>
           </p14:sldIdLst>
         </p14:section>
-        <p14:section name="Part 02 · 병목 규명" id="{1567F654-1EA3-4E8A-A219-F36CF8E74EFA}">
+        <p14:section name="Part 02 · 병목 규명" id="{7E277C51-C336-4BC8-B4E9-3E56DFCBB28D}">
           <p14:sldIdLst>
             <p14:sldId id="262"/>
             <p14:sldId id="263"/>
@@ -169,14 +169,14 @@
             <p14:sldId id="270"/>
           </p14:sldIdLst>
         </p14:section>
-        <p14:section name="Part 03 · 개선 전략" id="{3ECE593B-1BDE-4D00-B46E-B237AB461F22}">
+        <p14:section name="Part 03 · 개선 전략" id="{F1A0E16B-872E-4B25-8AAB-22A282DF0F30}">
           <p14:sldIdLst>
             <p14:sldId id="271"/>
             <p14:sldId id="272"/>
             <p14:sldId id="273"/>
           </p14:sldIdLst>
         </p14:section>
-        <p14:section name="Part 04 · Q&amp;A" id="{AD9E5171-9D45-4796-9B62-2F9A55F1C85E}">
+        <p14:section name="Part 04 · Q&amp;A" id="{17B46358-B65F-43A2-9FA9-539D263377B4}">
           <p14:sldIdLst>
             <p14:sldId id="274"/>
           </p14:sldIdLst>
@@ -226,7 +226,7 @@
     </p:spTree>
     <p:extLst>
       <p:ext uri="{BB962C8B-B14F-4D97-AF65-F5344CB8AC3E}">
-        <p14:creationId xmlns:p14="http://schemas.microsoft.com/office/powerpoint/2010/main" val="635013916"/>
+        <p14:creationId xmlns:p14="http://schemas.microsoft.com/office/powerpoint/2010/main" val="1335929262"/>
       </p:ext>
     </p:extLst>
   </p:cSld>
@@ -6815,7 +6815,7 @@
         <p:spPr>
           <a:xfrm>
             <a:off x="502920" y="1554480"/>
-            <a:ext cx="7818120" cy="3836047"/>
+            <a:ext cx="7818120" cy="3876740"/>
           </a:xfrm>
           <a:prstGeom prst="rect">
             <a:avLst/>
@@ -6915,7 +6915,7 @@
         <p:spPr>
           <a:xfrm>
             <a:off x="630936" y="1896110"/>
-            <a:ext cx="7562088" cy="3366401"/>
+            <a:ext cx="7562088" cy="3407094"/>
           </a:xfrm>
           <a:prstGeom prst="rect">
             <a:avLst/>
@@ -6931,7 +6931,7 @@
         <p:spPr>
           <a:xfrm>
             <a:off x="8503920" y="1554480"/>
-            <a:ext cx="3184855" cy="1205530"/>
+            <a:ext cx="3184855" cy="1219094"/>
           </a:xfrm>
           <a:prstGeom prst="rect">
             <a:avLst/>
@@ -7123,8 +7123,8 @@
         </p:nvSpPr>
         <p:spPr>
           <a:xfrm>
-            <a:off x="8503920" y="2869738"/>
-            <a:ext cx="3184855" cy="1205530"/>
+            <a:off x="8503920" y="2883302"/>
+            <a:ext cx="3184855" cy="1219094"/>
           </a:xfrm>
           <a:prstGeom prst="rect">
             <a:avLst/>
@@ -7170,7 +7170,7 @@
         </p:nvSpPr>
         <p:spPr>
           <a:xfrm>
-            <a:off x="8686800" y="3052618"/>
+            <a:off x="8686800" y="3066182"/>
             <a:ext cx="2819095" cy="158750"/>
           </a:xfrm>
           <a:prstGeom prst="rect">
@@ -7215,7 +7215,7 @@
         </p:nvSpPr>
         <p:spPr>
           <a:xfrm>
-            <a:off x="8686800" y="3266232"/>
+            <a:off x="8686800" y="3279796"/>
             <a:ext cx="2819095" cy="341630"/>
           </a:xfrm>
           <a:prstGeom prst="rect">
@@ -7271,7 +7271,7 @@
         </p:nvSpPr>
         <p:spPr>
           <a:xfrm>
-            <a:off x="8686800" y="3662726"/>
+            <a:off x="8686800" y="3676290"/>
             <a:ext cx="2819095" cy="195580"/>
           </a:xfrm>
           <a:prstGeom prst="rect">
@@ -7316,8 +7316,8 @@
         </p:nvSpPr>
         <p:spPr>
           <a:xfrm>
-            <a:off x="8503920" y="4184997"/>
-            <a:ext cx="3184855" cy="1205530"/>
+            <a:off x="8503920" y="4212125"/>
+            <a:ext cx="3184855" cy="1219094"/>
           </a:xfrm>
           <a:prstGeom prst="rect">
             <a:avLst/>
@@ -7363,7 +7363,7 @@
         </p:nvSpPr>
         <p:spPr>
           <a:xfrm>
-            <a:off x="8686800" y="4367877"/>
+            <a:off x="8686800" y="4395005"/>
             <a:ext cx="2819095" cy="158750"/>
           </a:xfrm>
           <a:prstGeom prst="rect">
@@ -7408,7 +7408,7 @@
         </p:nvSpPr>
         <p:spPr>
           <a:xfrm>
-            <a:off x="8686800" y="4581491"/>
+            <a:off x="8686800" y="4608619"/>
             <a:ext cx="2819095" cy="341630"/>
           </a:xfrm>
           <a:prstGeom prst="rect">
@@ -7464,7 +7464,7 @@
         </p:nvSpPr>
         <p:spPr>
           <a:xfrm>
-            <a:off x="8686800" y="4977985"/>
+            <a:off x="8686800" y="5005113"/>
             <a:ext cx="2819095" cy="195580"/>
           </a:xfrm>
           <a:prstGeom prst="rect">
@@ -7509,8 +7509,8 @@
         </p:nvSpPr>
         <p:spPr>
           <a:xfrm>
-            <a:off x="502920" y="5527687"/>
-            <a:ext cx="11185855" cy="763384"/>
+            <a:off x="502920" y="5568380"/>
+            <a:ext cx="11185855" cy="722691"/>
           </a:xfrm>
           <a:prstGeom prst="rect">
             <a:avLst/>
@@ -7556,7 +7556,7 @@
         </p:nvSpPr>
         <p:spPr>
           <a:xfrm>
-            <a:off x="685800" y="5710567"/>
+            <a:off x="685800" y="5751260"/>
             <a:ext cx="10820095" cy="222250"/>
           </a:xfrm>
           <a:prstGeom prst="rect">
